--- a/Presentations/Day-3-Recurrent Neural Networks-NEW.pptx
+++ b/Presentations/Day-3-Recurrent Neural Networks-NEW.pptx
@@ -2,31 +2,31 @@
 <file path=ppt/presentation.xml><?xml version="1.0" encoding="utf-8"?>
 <p:presentation xmlns:a="http://schemas.openxmlformats.org/drawingml/2006/main" xmlns:r="http://schemas.openxmlformats.org/officeDocument/2006/relationships" xmlns:p="http://schemas.openxmlformats.org/presentationml/2006/main" saveSubsetFonts="1" autoCompressPictures="0">
   <p:sldMasterIdLst>
-    <p:sldMasterId id="2147483672" r:id="rId1"/>
+    <p:sldMasterId id="2147483684" r:id="rId1"/>
   </p:sldMasterIdLst>
   <p:notesMasterIdLst>
     <p:notesMasterId r:id="rId21"/>
   </p:notesMasterIdLst>
   <p:sldIdLst>
-    <p:sldId id="393" r:id="rId2"/>
+    <p:sldId id="394" r:id="rId2"/>
     <p:sldId id="367" r:id="rId3"/>
     <p:sldId id="368" r:id="rId4"/>
-    <p:sldId id="379" r:id="rId5"/>
-    <p:sldId id="380" r:id="rId6"/>
-    <p:sldId id="381" r:id="rId7"/>
+    <p:sldId id="396" r:id="rId5"/>
+    <p:sldId id="395" r:id="rId6"/>
+    <p:sldId id="397" r:id="rId7"/>
     <p:sldId id="377" r:id="rId8"/>
-    <p:sldId id="382" r:id="rId9"/>
-    <p:sldId id="383" r:id="rId10"/>
-    <p:sldId id="384" r:id="rId11"/>
+    <p:sldId id="398" r:id="rId9"/>
+    <p:sldId id="399" r:id="rId10"/>
+    <p:sldId id="400" r:id="rId11"/>
     <p:sldId id="376" r:id="rId12"/>
-    <p:sldId id="385" r:id="rId13"/>
-    <p:sldId id="386" r:id="rId14"/>
-    <p:sldId id="387" r:id="rId15"/>
-    <p:sldId id="388" r:id="rId16"/>
-    <p:sldId id="389" r:id="rId17"/>
-    <p:sldId id="390" r:id="rId18"/>
-    <p:sldId id="391" r:id="rId19"/>
-    <p:sldId id="392" r:id="rId20"/>
+    <p:sldId id="401" r:id="rId13"/>
+    <p:sldId id="402" r:id="rId14"/>
+    <p:sldId id="403" r:id="rId15"/>
+    <p:sldId id="404" r:id="rId16"/>
+    <p:sldId id="405" r:id="rId17"/>
+    <p:sldId id="406" r:id="rId18"/>
+    <p:sldId id="407" r:id="rId19"/>
+    <p:sldId id="408" r:id="rId20"/>
   </p:sldIdLst>
   <p:sldSz cx="12192000" cy="6858000"/>
   <p:notesSz cx="6858000" cy="9144000"/>
@@ -1059,7 +1059,9 @@
           </a:xfrm>
         </p:spPr>
         <p:txBody>
-          <a:bodyPr anchor="b"/>
+          <a:bodyPr anchor="b">
+            <a:normAutofit/>
+          </a:bodyPr>
           <a:lstStyle>
             <a:lvl1pPr algn="ctr">
               <a:defRPr sz="6000"/>
@@ -1274,7 +1276,9 @@
         </p:nvSpPr>
         <p:spPr/>
         <p:txBody>
-          <a:bodyPr/>
+          <a:bodyPr>
+            <a:normAutofit/>
+          </a:bodyPr>
           <a:lstStyle/>
           <a:p>
             <a:r>
@@ -1477,7 +1481,9 @@
           </a:xfrm>
         </p:spPr>
         <p:txBody>
-          <a:bodyPr vert="eaVert"/>
+          <a:bodyPr vert="eaVert">
+            <a:normAutofit/>
+          </a:bodyPr>
           <a:lstStyle/>
           <a:p>
             <a:r>
@@ -1680,7 +1686,9 @@
         </p:nvSpPr>
         <p:spPr/>
         <p:txBody>
-          <a:bodyPr/>
+          <a:bodyPr>
+            <a:normAutofit/>
+          </a:bodyPr>
           <a:lstStyle/>
           <a:p>
             <a:r>
@@ -1883,7 +1891,9 @@
           </a:xfrm>
         </p:spPr>
         <p:txBody>
-          <a:bodyPr anchor="b"/>
+          <a:bodyPr anchor="b">
+            <a:normAutofit/>
+          </a:bodyPr>
           <a:lstStyle>
             <a:lvl1pPr>
               <a:defRPr sz="6000"/>
@@ -2153,7 +2163,9 @@
         </p:nvSpPr>
         <p:spPr/>
         <p:txBody>
-          <a:bodyPr/>
+          <a:bodyPr>
+            <a:normAutofit/>
+          </a:bodyPr>
           <a:lstStyle/>
           <a:p>
             <a:r>
@@ -2423,7 +2435,9 @@
           </a:xfrm>
         </p:spPr>
         <p:txBody>
-          <a:bodyPr/>
+          <a:bodyPr>
+            <a:normAutofit/>
+          </a:bodyPr>
           <a:lstStyle/>
           <a:p>
             <a:r>
@@ -2830,7 +2844,9 @@
         </p:nvSpPr>
         <p:spPr/>
         <p:txBody>
-          <a:bodyPr/>
+          <a:bodyPr>
+            <a:normAutofit/>
+          </a:bodyPr>
           <a:lstStyle/>
           <a:p>
             <a:r>
@@ -3089,7 +3105,9 @@
           </a:xfrm>
         </p:spPr>
         <p:txBody>
-          <a:bodyPr anchor="b"/>
+          <a:bodyPr anchor="b">
+            <a:normAutofit/>
+          </a:bodyPr>
           <a:lstStyle>
             <a:lvl1pPr>
               <a:defRPr sz="3200"/>
@@ -3400,7 +3418,9 @@
           </a:xfrm>
         </p:spPr>
         <p:txBody>
-          <a:bodyPr anchor="b"/>
+          <a:bodyPr anchor="b">
+            <a:normAutofit/>
+          </a:bodyPr>
           <a:lstStyle>
             <a:lvl1pPr>
               <a:defRPr sz="3200"/>
@@ -3953,17 +3973,17 @@
   </p:cSld>
   <p:clrMap bg1="lt1" tx1="dk1" bg2="lt2" tx2="dk2" accent1="accent1" accent2="accent2" accent3="accent3" accent4="accent4" accent5="accent5" accent6="accent6" hlink="hlink" folHlink="folHlink"/>
   <p:sldLayoutIdLst>
-    <p:sldLayoutId id="2147483673" r:id="rId1"/>
-    <p:sldLayoutId id="2147483674" r:id="rId2"/>
-    <p:sldLayoutId id="2147483675" r:id="rId3"/>
-    <p:sldLayoutId id="2147483676" r:id="rId4"/>
-    <p:sldLayoutId id="2147483677" r:id="rId5"/>
-    <p:sldLayoutId id="2147483678" r:id="rId6"/>
-    <p:sldLayoutId id="2147483679" r:id="rId7"/>
-    <p:sldLayoutId id="2147483680" r:id="rId8"/>
-    <p:sldLayoutId id="2147483681" r:id="rId9"/>
-    <p:sldLayoutId id="2147483682" r:id="rId10"/>
-    <p:sldLayoutId id="2147483683" r:id="rId11"/>
+    <p:sldLayoutId id="2147483685" r:id="rId1"/>
+    <p:sldLayoutId id="2147483686" r:id="rId2"/>
+    <p:sldLayoutId id="2147483687" r:id="rId3"/>
+    <p:sldLayoutId id="2147483688" r:id="rId4"/>
+    <p:sldLayoutId id="2147483689" r:id="rId5"/>
+    <p:sldLayoutId id="2147483690" r:id="rId6"/>
+    <p:sldLayoutId id="2147483691" r:id="rId7"/>
+    <p:sldLayoutId id="2147483692" r:id="rId8"/>
+    <p:sldLayoutId id="2147483693" r:id="rId9"/>
+    <p:sldLayoutId id="2147483694" r:id="rId10"/>
+    <p:sldLayoutId id="2147483695" r:id="rId11"/>
   </p:sldLayoutIdLst>
   <p:txStyles>
     <p:titleStyle>
@@ -4331,7 +4351,7 @@
     </p:spTree>
     <p:extLst>
       <p:ext uri="{BB962C8B-B14F-4D97-AF65-F5344CB8AC3E}">
-        <p14:creationId xmlns:p14="http://schemas.microsoft.com/office/powerpoint/2010/main" val="179680464"/>
+        <p14:creationId xmlns:p14="http://schemas.microsoft.com/office/powerpoint/2010/main" val="2480677786"/>
       </p:ext>
     </p:extLst>
   </p:cSld>
@@ -4375,7 +4395,7 @@
         </p:spPr>
         <p:txBody>
           <a:bodyPr vert="horz" wrap="square" lIns="0" tIns="33975" rIns="0" bIns="0" rtlCol="0" anchor="ctr">
-            <a:spAutoFit/>
+            <a:normAutofit/>
             <a:scene3d>
               <a:camera prst="orthographicFront"/>
               <a:lightRig rig="threePt" dir="t">
@@ -4466,8 +4486,8 @@
         </p:nvSpPr>
         <p:spPr>
           <a:xfrm>
-            <a:off x="0" y="958850"/>
-            <a:ext cx="8458200" cy="5700713"/>
+            <a:off x="0" y="1598613"/>
+            <a:ext cx="11201400" cy="4049712"/>
           </a:xfrm>
           <a:prstGeom prst="rect">
             <a:avLst/>
@@ -4475,7 +4495,7 @@
         </p:spPr>
         <p:txBody>
           <a:bodyPr vert="horz" wrap="square" lIns="0" tIns="201687" rIns="0" bIns="0" rtlCol="0">
-            <a:spAutoFit/>
+            <a:normAutofit/>
           </a:bodyPr>
           <a:lstStyle/>
           <a:p>
@@ -5175,7 +5195,7 @@
     </p:spTree>
     <p:extLst>
       <p:ext uri="{BB962C8B-B14F-4D97-AF65-F5344CB8AC3E}">
-        <p14:creationId xmlns:p14="http://schemas.microsoft.com/office/powerpoint/2010/main" val="1481753558"/>
+        <p14:creationId xmlns:p14="http://schemas.microsoft.com/office/powerpoint/2010/main" val="3061337119"/>
       </p:ext>
     </p:extLst>
   </p:cSld>
@@ -5946,7 +5966,7 @@
         </p:spPr>
         <p:txBody>
           <a:bodyPr vert="vert270" wrap="square" lIns="0" tIns="6292" rIns="0" bIns="0" rtlCol="0">
-            <a:spAutoFit/>
+            <a:normAutofit/>
           </a:bodyPr>
           <a:lstStyle/>
           <a:p>
@@ -5999,7 +6019,12 @@
             <p:ph type="title"/>
           </p:nvPr>
         </p:nvSpPr>
-        <p:spPr/>
+        <p:spPr>
+          <a:xfrm>
+            <a:off x="838200" y="177048"/>
+            <a:ext cx="10515600" cy="1325563"/>
+          </a:xfrm>
+        </p:spPr>
         <p:txBody>
           <a:bodyPr>
             <a:normAutofit/>
@@ -6057,31 +6082,6 @@
               <a:t>Forecasting</a:t>
             </a:r>
             <a:endParaRPr lang="en-US" dirty="0"/>
-          </a:p>
-        </p:txBody>
-      </p:sp>
-      <p:sp>
-        <p:nvSpPr>
-          <p:cNvPr id="2" name="Content Placeholder 1">
-            <a:extLst>
-              <a:ext uri="{FF2B5EF4-FFF2-40B4-BE49-F238E27FC236}">
-                <a16:creationId xmlns:a16="http://schemas.microsoft.com/office/drawing/2014/main" id="{05AA644C-918F-B40B-BC17-974503F1FFAF}"/>
-              </a:ext>
-            </a:extLst>
-          </p:cNvPr>
-          <p:cNvSpPr>
-            <a:spLocks noGrp="1"/>
-          </p:cNvSpPr>
-          <p:nvPr>
-            <p:ph idx="1"/>
-          </p:nvPr>
-        </p:nvSpPr>
-        <p:spPr/>
-        <p:txBody>
-          <a:bodyPr/>
-          <a:lstStyle/>
-          <a:p>
-            <a:endParaRPr lang="en-US"/>
           </a:p>
         </p:txBody>
       </p:sp>
@@ -6132,7 +6132,7 @@
         </p:spPr>
         <p:txBody>
           <a:bodyPr vert="vert270" wrap="square" lIns="0" tIns="6292" rIns="0" bIns="0" rtlCol="0">
-            <a:spAutoFit/>
+            <a:normAutofit/>
           </a:bodyPr>
           <a:lstStyle/>
           <a:p>
@@ -6172,7 +6172,7 @@
         </p:spPr>
         <p:txBody>
           <a:bodyPr vert="vert270" wrap="square" lIns="0" tIns="6292" rIns="0" bIns="0" rtlCol="0">
-            <a:spAutoFit/>
+            <a:normAutofit/>
           </a:bodyPr>
           <a:lstStyle/>
           <a:p>
@@ -6240,7 +6240,7 @@
         </p:spPr>
         <p:txBody>
           <a:bodyPr vert="vert270" wrap="square" lIns="0" tIns="6292" rIns="0" bIns="0" rtlCol="0">
-            <a:spAutoFit/>
+            <a:normAutofit/>
           </a:bodyPr>
           <a:lstStyle/>
           <a:p>
@@ -6308,7 +6308,7 @@
         </p:spPr>
         <p:txBody>
           <a:bodyPr vert="vert270" wrap="square" lIns="0" tIns="6292" rIns="0" bIns="0" rtlCol="0">
-            <a:spAutoFit/>
+            <a:normAutofit/>
           </a:bodyPr>
           <a:lstStyle/>
           <a:p>
@@ -6376,7 +6376,7 @@
         </p:spPr>
         <p:txBody>
           <a:bodyPr vert="vert270" wrap="square" lIns="0" tIns="6292" rIns="0" bIns="0" rtlCol="0">
-            <a:spAutoFit/>
+            <a:normAutofit/>
           </a:bodyPr>
           <a:lstStyle/>
           <a:p>
@@ -6416,7 +6416,7 @@
         </p:spPr>
         <p:txBody>
           <a:bodyPr vert="vert270" wrap="square" lIns="0" tIns="6292" rIns="0" bIns="0" rtlCol="0">
-            <a:spAutoFit/>
+            <a:normAutofit/>
           </a:bodyPr>
           <a:lstStyle/>
           <a:p>
@@ -6456,7 +6456,7 @@
         </p:spPr>
         <p:txBody>
           <a:bodyPr vert="horz" wrap="square" lIns="0" tIns="33975" rIns="0" bIns="0" rtlCol="0">
-            <a:spAutoFit/>
+            <a:normAutofit/>
           </a:bodyPr>
           <a:lstStyle/>
           <a:p>
@@ -6496,7 +6496,7 @@
         </p:spPr>
         <p:txBody>
           <a:bodyPr vert="horz" wrap="square" lIns="0" tIns="33975" rIns="0" bIns="0" rtlCol="0">
-            <a:spAutoFit/>
+            <a:normAutofit/>
           </a:bodyPr>
           <a:lstStyle/>
           <a:p>
@@ -6536,7 +6536,7 @@
         </p:spPr>
         <p:txBody>
           <a:bodyPr vert="horz" wrap="square" lIns="0" tIns="33975" rIns="0" bIns="0" rtlCol="0">
-            <a:spAutoFit/>
+            <a:normAutofit/>
           </a:bodyPr>
           <a:lstStyle/>
           <a:p>
@@ -6576,7 +6576,7 @@
         </p:spPr>
         <p:txBody>
           <a:bodyPr vert="horz" wrap="square" lIns="0" tIns="33975" rIns="0" bIns="0" rtlCol="0">
-            <a:spAutoFit/>
+            <a:normAutofit/>
           </a:bodyPr>
           <a:lstStyle/>
           <a:p>
@@ -6616,7 +6616,7 @@
         </p:spPr>
         <p:txBody>
           <a:bodyPr vert="horz" wrap="square" lIns="0" tIns="33975" rIns="0" bIns="0" rtlCol="0">
-            <a:spAutoFit/>
+            <a:normAutofit/>
           </a:bodyPr>
           <a:lstStyle/>
           <a:p>
@@ -6656,7 +6656,7 @@
         </p:spPr>
         <p:txBody>
           <a:bodyPr vert="vert270" wrap="square" lIns="0" tIns="6292" rIns="0" bIns="0" rtlCol="0">
-            <a:spAutoFit/>
+            <a:normAutofit/>
           </a:bodyPr>
           <a:lstStyle/>
           <a:p>
@@ -6696,7 +6696,7 @@
         </p:spPr>
         <p:txBody>
           <a:bodyPr vert="vert270" wrap="square" lIns="0" tIns="6292" rIns="0" bIns="0" rtlCol="0">
-            <a:spAutoFit/>
+            <a:normAutofit/>
           </a:bodyPr>
           <a:lstStyle/>
           <a:p>
@@ -6736,7 +6736,7 @@
         </p:spPr>
         <p:txBody>
           <a:bodyPr vert="vert270" wrap="square" lIns="0" tIns="6292" rIns="0" bIns="0" rtlCol="0">
-            <a:spAutoFit/>
+            <a:normAutofit/>
           </a:bodyPr>
           <a:lstStyle/>
           <a:p>
@@ -6762,7 +6762,7 @@
     </p:spTree>
     <p:extLst>
       <p:ext uri="{BB962C8B-B14F-4D97-AF65-F5344CB8AC3E}">
-        <p14:creationId xmlns:p14="http://schemas.microsoft.com/office/powerpoint/2010/main" val="1019568090"/>
+        <p14:creationId xmlns:p14="http://schemas.microsoft.com/office/powerpoint/2010/main" val="315078839"/>
       </p:ext>
     </p:extLst>
   </p:cSld>
@@ -6880,8 +6880,8 @@
         </p:nvSpPr>
         <p:spPr>
           <a:xfrm>
-            <a:off x="1981201" y="1143001"/>
-            <a:ext cx="8289235" cy="4805545"/>
+            <a:off x="994411" y="1485916"/>
+            <a:ext cx="10317479" cy="5211747"/>
           </a:xfrm>
           <a:prstGeom prst="rect">
             <a:avLst/>
@@ -6889,7 +6889,7 @@
         </p:spPr>
         <p:txBody>
           <a:bodyPr vert="horz" wrap="square" lIns="0" tIns="13842" rIns="0" bIns="0" rtlCol="0">
-            <a:spAutoFit/>
+            <a:normAutofit/>
           </a:bodyPr>
           <a:lstStyle/>
           <a:p>
@@ -6902,314 +6902,314 @@
               </a:spcBef>
             </a:pPr>
             <a:r>
-              <a:rPr sz="2000" spc="-159" dirty="0">
+              <a:rPr sz="2400" spc="-159" dirty="0">
                 <a:latin typeface="Source Sans Pro"/>
                 <a:cs typeface="Source Sans Pro"/>
               </a:rPr>
               <a:t>Shown</a:t>
             </a:r>
             <a:r>
-              <a:rPr sz="2000" spc="-10" dirty="0">
-                <a:latin typeface="Source Sans Pro"/>
-                <a:cs typeface="Source Sans Pro"/>
-              </a:rPr>
-              <a:t> </a:t>
-            </a:r>
-            <a:r>
-              <a:rPr sz="2000" spc="-59" dirty="0">
+              <a:rPr sz="2400" spc="-10" dirty="0">
+                <a:latin typeface="Source Sans Pro"/>
+                <a:cs typeface="Source Sans Pro"/>
+              </a:rPr>
+              <a:t> </a:t>
+            </a:r>
+            <a:r>
+              <a:rPr sz="2400" spc="-59" dirty="0">
                 <a:latin typeface="Source Sans Pro"/>
                 <a:cs typeface="Source Sans Pro"/>
               </a:rPr>
               <a:t>in</a:t>
             </a:r>
             <a:r>
-              <a:rPr sz="2000" dirty="0">
-                <a:latin typeface="Source Sans Pro"/>
-                <a:cs typeface="Source Sans Pro"/>
-              </a:rPr>
-              <a:t> </a:t>
-            </a:r>
-            <a:r>
-              <a:rPr lang="en-US" sz="2000" dirty="0">
+              <a:rPr sz="2400" dirty="0">
+                <a:latin typeface="Source Sans Pro"/>
+                <a:cs typeface="Source Sans Pro"/>
+              </a:rPr>
+              <a:t> </a:t>
+            </a:r>
+            <a:r>
+              <a:rPr lang="en-US" sz="2400" dirty="0">
                 <a:latin typeface="Source Sans Pro"/>
                 <a:cs typeface="Source Sans Pro"/>
               </a:rPr>
               <a:t>the </a:t>
             </a:r>
             <a:r>
-              <a:rPr sz="2000" spc="-168" dirty="0">
+              <a:rPr sz="2400" spc="-168" dirty="0">
                 <a:latin typeface="Source Sans Pro"/>
                 <a:cs typeface="Source Sans Pro"/>
               </a:rPr>
               <a:t>previous</a:t>
             </a:r>
             <a:r>
-              <a:rPr sz="2000" spc="-10" dirty="0">
-                <a:latin typeface="Source Sans Pro"/>
-                <a:cs typeface="Source Sans Pro"/>
-              </a:rPr>
-              <a:t> </a:t>
-            </a:r>
-            <a:r>
-              <a:rPr sz="2000" spc="-159" dirty="0">
+              <a:rPr sz="2400" spc="-10" dirty="0">
+                <a:latin typeface="Source Sans Pro"/>
+                <a:cs typeface="Source Sans Pro"/>
+              </a:rPr>
+              <a:t> </a:t>
+            </a:r>
+            <a:r>
+              <a:rPr sz="2400" spc="-159" dirty="0">
                 <a:latin typeface="Source Sans Pro"/>
                 <a:cs typeface="Source Sans Pro"/>
               </a:rPr>
               <a:t>slide</a:t>
             </a:r>
             <a:r>
-              <a:rPr sz="2000" dirty="0">
-                <a:latin typeface="Source Sans Pro"/>
-                <a:cs typeface="Source Sans Pro"/>
-              </a:rPr>
-              <a:t> </a:t>
-            </a:r>
-            <a:r>
-              <a:rPr sz="2000" spc="-159" dirty="0">
+              <a:rPr sz="2400" dirty="0">
+                <a:latin typeface="Source Sans Pro"/>
+                <a:cs typeface="Source Sans Pro"/>
+              </a:rPr>
+              <a:t> </a:t>
+            </a:r>
+            <a:r>
+              <a:rPr sz="2400" spc="-159" dirty="0">
                 <a:latin typeface="Source Sans Pro"/>
                 <a:cs typeface="Source Sans Pro"/>
               </a:rPr>
               <a:t>are</a:t>
             </a:r>
             <a:r>
-              <a:rPr sz="2000" dirty="0">
-                <a:latin typeface="Source Sans Pro"/>
-                <a:cs typeface="Source Sans Pro"/>
-              </a:rPr>
-              <a:t> </a:t>
-            </a:r>
-            <a:r>
-              <a:rPr sz="2000" spc="-149" dirty="0">
+              <a:rPr sz="2400" dirty="0">
+                <a:latin typeface="Source Sans Pro"/>
+                <a:cs typeface="Source Sans Pro"/>
+              </a:rPr>
+              <a:t> </a:t>
+            </a:r>
+            <a:r>
+              <a:rPr sz="2400" spc="-149" dirty="0">
                 <a:latin typeface="Source Sans Pro"/>
                 <a:cs typeface="Source Sans Pro"/>
               </a:rPr>
               <a:t>three</a:t>
             </a:r>
             <a:r>
-              <a:rPr sz="2000" spc="-10" dirty="0">
-                <a:latin typeface="Source Sans Pro"/>
-                <a:cs typeface="Source Sans Pro"/>
-              </a:rPr>
-              <a:t> </a:t>
-            </a:r>
-            <a:r>
-              <a:rPr sz="2000" spc="-59" dirty="0">
+              <a:rPr sz="2400" spc="-10" dirty="0">
+                <a:latin typeface="Source Sans Pro"/>
+                <a:cs typeface="Source Sans Pro"/>
+              </a:rPr>
+              <a:t> </a:t>
+            </a:r>
+            <a:r>
+              <a:rPr sz="2400" spc="-59" dirty="0">
                 <a:latin typeface="Source Sans Pro"/>
                 <a:cs typeface="Source Sans Pro"/>
               </a:rPr>
               <a:t>daily</a:t>
             </a:r>
             <a:r>
-              <a:rPr sz="2000" dirty="0">
-                <a:latin typeface="Source Sans Pro"/>
-                <a:cs typeface="Source Sans Pro"/>
-              </a:rPr>
-              <a:t> </a:t>
-            </a:r>
-            <a:r>
-              <a:rPr sz="2000" spc="-129" dirty="0">
+              <a:rPr sz="2400" dirty="0">
+                <a:latin typeface="Source Sans Pro"/>
+                <a:cs typeface="Source Sans Pro"/>
+              </a:rPr>
+              <a:t> </a:t>
+            </a:r>
+            <a:r>
+              <a:rPr sz="2400" spc="-129" dirty="0">
                 <a:latin typeface="Source Sans Pro"/>
                 <a:cs typeface="Source Sans Pro"/>
               </a:rPr>
               <a:t>time</a:t>
             </a:r>
             <a:r>
-              <a:rPr sz="2000" dirty="0">
-                <a:latin typeface="Source Sans Pro"/>
-                <a:cs typeface="Source Sans Pro"/>
-              </a:rPr>
-              <a:t> </a:t>
-            </a:r>
-            <a:r>
-              <a:rPr sz="2000" spc="-198" dirty="0">
+              <a:rPr sz="2400" dirty="0">
+                <a:latin typeface="Source Sans Pro"/>
+                <a:cs typeface="Source Sans Pro"/>
+              </a:rPr>
+              <a:t> </a:t>
+            </a:r>
+            <a:r>
+              <a:rPr sz="2400" spc="-198" dirty="0">
                 <a:latin typeface="Source Sans Pro"/>
                 <a:cs typeface="Source Sans Pro"/>
               </a:rPr>
               <a:t>series</a:t>
             </a:r>
             <a:r>
-              <a:rPr sz="2000" spc="-10" dirty="0">
-                <a:latin typeface="Source Sans Pro"/>
-                <a:cs typeface="Source Sans Pro"/>
-              </a:rPr>
-              <a:t> </a:t>
-            </a:r>
-            <a:r>
-              <a:rPr sz="2000" spc="-168" dirty="0">
+              <a:rPr sz="2400" spc="-10" dirty="0">
+                <a:latin typeface="Source Sans Pro"/>
+                <a:cs typeface="Source Sans Pro"/>
+              </a:rPr>
+              <a:t> </a:t>
+            </a:r>
+            <a:r>
+              <a:rPr sz="2400" spc="-168" dirty="0">
                 <a:latin typeface="Source Sans Pro"/>
                 <a:cs typeface="Source Sans Pro"/>
               </a:rPr>
               <a:t>for</a:t>
             </a:r>
             <a:r>
-              <a:rPr sz="2000" dirty="0">
-                <a:latin typeface="Source Sans Pro"/>
-                <a:cs typeface="Source Sans Pro"/>
-              </a:rPr>
-              <a:t> </a:t>
-            </a:r>
-            <a:r>
-              <a:rPr sz="2000" spc="-129" dirty="0">
+              <a:rPr sz="2400" dirty="0">
+                <a:latin typeface="Source Sans Pro"/>
+                <a:cs typeface="Source Sans Pro"/>
+              </a:rPr>
+              <a:t> </a:t>
+            </a:r>
+            <a:r>
+              <a:rPr sz="2400" spc="-129" dirty="0">
                 <a:latin typeface="Source Sans Pro"/>
                 <a:cs typeface="Source Sans Pro"/>
               </a:rPr>
               <a:t>the</a:t>
             </a:r>
             <a:r>
-              <a:rPr sz="2000" dirty="0">
-                <a:latin typeface="Source Sans Pro"/>
-                <a:cs typeface="Source Sans Pro"/>
-              </a:rPr>
-              <a:t> </a:t>
-            </a:r>
-            <a:r>
-              <a:rPr sz="2000" spc="-109" dirty="0">
+              <a:rPr sz="2400" dirty="0">
+                <a:latin typeface="Source Sans Pro"/>
+                <a:cs typeface="Source Sans Pro"/>
+              </a:rPr>
+              <a:t> </a:t>
+            </a:r>
+            <a:r>
+              <a:rPr sz="2400" spc="-109" dirty="0">
                 <a:latin typeface="Source Sans Pro"/>
                 <a:cs typeface="Source Sans Pro"/>
               </a:rPr>
               <a:t>period </a:t>
             </a:r>
             <a:r>
-              <a:rPr sz="2000" spc="-188" dirty="0">
+              <a:rPr sz="2400" spc="-188" dirty="0">
                 <a:latin typeface="Source Sans Pro"/>
                 <a:cs typeface="Source Sans Pro"/>
               </a:rPr>
               <a:t>December</a:t>
             </a:r>
             <a:r>
-              <a:rPr sz="2000" spc="59" dirty="0">
-                <a:latin typeface="Source Sans Pro"/>
-                <a:cs typeface="Source Sans Pro"/>
-              </a:rPr>
-              <a:t> </a:t>
-            </a:r>
-            <a:r>
-              <a:rPr sz="2000" spc="-198" dirty="0">
+              <a:rPr sz="2400" spc="59" dirty="0">
+                <a:latin typeface="Source Sans Pro"/>
+                <a:cs typeface="Source Sans Pro"/>
+              </a:rPr>
+              <a:t> </a:t>
+            </a:r>
+            <a:r>
+              <a:rPr sz="2400" spc="-198" dirty="0">
                 <a:latin typeface="Source Sans Pro"/>
                 <a:cs typeface="Source Sans Pro"/>
               </a:rPr>
               <a:t>3,</a:t>
             </a:r>
             <a:r>
-              <a:rPr sz="2000" spc="69" dirty="0">
-                <a:latin typeface="Source Sans Pro"/>
-                <a:cs typeface="Source Sans Pro"/>
-              </a:rPr>
-              <a:t> </a:t>
-            </a:r>
-            <a:r>
-              <a:rPr sz="2000" spc="-317" dirty="0">
+              <a:rPr sz="2400" spc="69" dirty="0">
+                <a:latin typeface="Source Sans Pro"/>
+                <a:cs typeface="Source Sans Pro"/>
+              </a:rPr>
+              <a:t> </a:t>
+            </a:r>
+            <a:r>
+              <a:rPr sz="2400" spc="-317" dirty="0">
                 <a:latin typeface="Source Sans Pro"/>
                 <a:cs typeface="Source Sans Pro"/>
               </a:rPr>
               <a:t>1962</a:t>
             </a:r>
             <a:r>
-              <a:rPr lang="en-US" sz="2000" spc="-317" dirty="0">
+              <a:rPr lang="en-US" sz="2400" spc="-317" dirty="0">
                 <a:latin typeface="Source Sans Pro"/>
                 <a:cs typeface="Source Sans Pro"/>
               </a:rPr>
               <a:t>,</a:t>
             </a:r>
             <a:r>
-              <a:rPr sz="2000" spc="59" dirty="0">
-                <a:latin typeface="Source Sans Pro"/>
-                <a:cs typeface="Source Sans Pro"/>
-              </a:rPr>
-              <a:t> </a:t>
-            </a:r>
-            <a:r>
-              <a:rPr sz="2000" spc="-59" dirty="0">
+              <a:rPr sz="2400" spc="59" dirty="0">
+                <a:latin typeface="Source Sans Pro"/>
+                <a:cs typeface="Source Sans Pro"/>
+              </a:rPr>
+              <a:t> </a:t>
+            </a:r>
+            <a:r>
+              <a:rPr sz="2400" spc="-59" dirty="0">
                 <a:latin typeface="Source Sans Pro"/>
                 <a:cs typeface="Source Sans Pro"/>
               </a:rPr>
               <a:t>to</a:t>
             </a:r>
             <a:r>
-              <a:rPr sz="2000" spc="69" dirty="0">
-                <a:latin typeface="Source Sans Pro"/>
-                <a:cs typeface="Source Sans Pro"/>
-              </a:rPr>
-              <a:t> </a:t>
-            </a:r>
-            <a:r>
-              <a:rPr sz="2000" spc="-188" dirty="0">
+              <a:rPr sz="2400" spc="69" dirty="0">
+                <a:latin typeface="Source Sans Pro"/>
+                <a:cs typeface="Source Sans Pro"/>
+              </a:rPr>
+              <a:t> </a:t>
+            </a:r>
+            <a:r>
+              <a:rPr sz="2400" spc="-188" dirty="0">
                 <a:latin typeface="Source Sans Pro"/>
                 <a:cs typeface="Source Sans Pro"/>
               </a:rPr>
               <a:t>December</a:t>
             </a:r>
             <a:r>
-              <a:rPr sz="2000" spc="69" dirty="0">
-                <a:latin typeface="Source Sans Pro"/>
-                <a:cs typeface="Source Sans Pro"/>
-              </a:rPr>
-              <a:t> </a:t>
-            </a:r>
-            <a:r>
-              <a:rPr sz="2000" spc="-248" dirty="0">
+              <a:rPr sz="2400" spc="69" dirty="0">
+                <a:latin typeface="Source Sans Pro"/>
+                <a:cs typeface="Source Sans Pro"/>
+              </a:rPr>
+              <a:t> </a:t>
+            </a:r>
+            <a:r>
+              <a:rPr sz="2400" spc="-248" dirty="0">
                 <a:latin typeface="Source Sans Pro"/>
                 <a:cs typeface="Source Sans Pro"/>
               </a:rPr>
               <a:t>31,</a:t>
             </a:r>
             <a:r>
-              <a:rPr sz="2000" spc="59" dirty="0">
-                <a:latin typeface="Source Sans Pro"/>
-                <a:cs typeface="Source Sans Pro"/>
-              </a:rPr>
-              <a:t> </a:t>
-            </a:r>
-            <a:r>
-              <a:rPr sz="2000" spc="-317" dirty="0">
+              <a:rPr sz="2400" spc="59" dirty="0">
+                <a:latin typeface="Source Sans Pro"/>
+                <a:cs typeface="Source Sans Pro"/>
+              </a:rPr>
+              <a:t> </a:t>
+            </a:r>
+            <a:r>
+              <a:rPr sz="2400" spc="-317" dirty="0">
                 <a:latin typeface="Source Sans Pro"/>
                 <a:cs typeface="Source Sans Pro"/>
               </a:rPr>
               <a:t>1986</a:t>
             </a:r>
             <a:r>
-              <a:rPr sz="2000" spc="69" dirty="0">
-                <a:latin typeface="Source Sans Pro"/>
-                <a:cs typeface="Source Sans Pro"/>
-              </a:rPr>
-              <a:t> </a:t>
-            </a:r>
-            <a:r>
-              <a:rPr sz="2000" spc="-208" dirty="0">
+              <a:rPr sz="2400" spc="69" dirty="0">
+                <a:latin typeface="Source Sans Pro"/>
+                <a:cs typeface="Source Sans Pro"/>
+              </a:rPr>
+              <a:t> </a:t>
+            </a:r>
+            <a:r>
+              <a:rPr sz="2400" spc="-208" dirty="0">
                 <a:latin typeface="Source Sans Pro"/>
                 <a:cs typeface="Source Sans Pro"/>
               </a:rPr>
               <a:t>(6,051</a:t>
             </a:r>
             <a:r>
-              <a:rPr sz="2000" spc="59" dirty="0">
-                <a:latin typeface="Source Sans Pro"/>
-                <a:cs typeface="Source Sans Pro"/>
-              </a:rPr>
-              <a:t> </a:t>
-            </a:r>
-            <a:r>
-              <a:rPr sz="2000" spc="-119" dirty="0">
+              <a:rPr sz="2400" spc="59" dirty="0">
+                <a:latin typeface="Source Sans Pro"/>
+                <a:cs typeface="Source Sans Pro"/>
+              </a:rPr>
+              <a:t> </a:t>
+            </a:r>
+            <a:r>
+              <a:rPr sz="2400" spc="-119" dirty="0">
                 <a:latin typeface="Source Sans Pro"/>
                 <a:cs typeface="Source Sans Pro"/>
               </a:rPr>
               <a:t>trading</a:t>
             </a:r>
             <a:r>
-              <a:rPr sz="2000" spc="69" dirty="0">
-                <a:latin typeface="Source Sans Pro"/>
-                <a:cs typeface="Source Sans Pro"/>
-              </a:rPr>
-              <a:t> </a:t>
-            </a:r>
-            <a:r>
-              <a:rPr sz="2000" spc="-20" dirty="0">
+              <a:rPr sz="2400" spc="69" dirty="0">
+                <a:latin typeface="Source Sans Pro"/>
+                <a:cs typeface="Source Sans Pro"/>
+              </a:rPr>
+              <a:t> </a:t>
+            </a:r>
+            <a:r>
+              <a:rPr sz="2400" spc="-20" dirty="0">
                 <a:latin typeface="Source Sans Pro"/>
                 <a:cs typeface="Source Sans Pro"/>
               </a:rPr>
               <a:t>days):</a:t>
             </a:r>
-            <a:endParaRPr sz="2000" dirty="0">
+            <a:endParaRPr sz="2400" dirty="0">
               <a:latin typeface="Source Sans Pro"/>
               <a:cs typeface="Source Sans Pro"/>
             </a:endParaRPr>
@@ -7232,7 +7232,7 @@
               </a:tabLst>
             </a:pPr>
             <a:r>
-              <a:rPr sz="2000" spc="-188" dirty="0">
+              <a:rPr sz="2400" spc="-188" dirty="0">
                 <a:solidFill>
                   <a:srgbClr val="990000"/>
                 </a:solidFill>
@@ -7242,7 +7242,7 @@
               <a:t>Log</a:t>
             </a:r>
             <a:r>
-              <a:rPr sz="2000" spc="-178" dirty="0">
+              <a:rPr sz="2400" spc="-178" dirty="0">
                 <a:solidFill>
                   <a:srgbClr val="990000"/>
                 </a:solidFill>
@@ -7252,7 +7252,7 @@
               <a:t> </a:t>
             </a:r>
             <a:r>
-              <a:rPr sz="2000" spc="-198" dirty="0">
+              <a:rPr sz="2400" spc="-198" dirty="0">
                 <a:solidFill>
                   <a:srgbClr val="990000"/>
                 </a:solidFill>
@@ -7262,7 +7262,7 @@
               <a:t>trading</a:t>
             </a:r>
             <a:r>
-              <a:rPr sz="2000" spc="-178" dirty="0">
+              <a:rPr sz="2400" spc="-178" dirty="0">
                 <a:solidFill>
                   <a:srgbClr val="990000"/>
                 </a:solidFill>
@@ -7272,7 +7272,7 @@
               <a:t> </a:t>
             </a:r>
             <a:r>
-              <a:rPr sz="2000" spc="-139" dirty="0">
+              <a:rPr sz="2400" spc="-139" dirty="0">
                 <a:solidFill>
                   <a:srgbClr val="990000"/>
                 </a:solidFill>
@@ -7282,265 +7282,265 @@
               <a:t>volume</a:t>
             </a:r>
             <a:r>
-              <a:rPr sz="2000" spc="-139" dirty="0">
+              <a:rPr sz="2400" spc="-139" dirty="0">
                 <a:latin typeface="Source Sans Pro"/>
                 <a:cs typeface="Source Sans Pro"/>
               </a:rPr>
               <a:t>.</a:t>
             </a:r>
             <a:r>
-              <a:rPr sz="2000" spc="10" dirty="0">
-                <a:latin typeface="Source Sans Pro"/>
-                <a:cs typeface="Source Sans Pro"/>
-              </a:rPr>
-              <a:t> </a:t>
-            </a:r>
-            <a:r>
-              <a:rPr sz="2000" spc="-40" dirty="0">
+              <a:rPr sz="2400" spc="10" dirty="0">
+                <a:latin typeface="Source Sans Pro"/>
+                <a:cs typeface="Source Sans Pro"/>
+              </a:rPr>
+              <a:t> </a:t>
+            </a:r>
+            <a:r>
+              <a:rPr sz="2400" spc="-40" dirty="0">
                 <a:latin typeface="Source Sans Pro"/>
                 <a:cs typeface="Source Sans Pro"/>
               </a:rPr>
               <a:t>This</a:t>
             </a:r>
             <a:r>
-              <a:rPr sz="2000" spc="-20" dirty="0">
-                <a:latin typeface="Source Sans Pro"/>
-                <a:cs typeface="Source Sans Pro"/>
-              </a:rPr>
-              <a:t> </a:t>
-            </a:r>
-            <a:r>
-              <a:rPr sz="2000" spc="-99" dirty="0">
+              <a:rPr sz="2400" spc="-20" dirty="0">
+                <a:latin typeface="Source Sans Pro"/>
+                <a:cs typeface="Source Sans Pro"/>
+              </a:rPr>
+              <a:t> </a:t>
+            </a:r>
+            <a:r>
+              <a:rPr sz="2400" spc="-99" dirty="0">
                 <a:latin typeface="Source Sans Pro"/>
                 <a:cs typeface="Source Sans Pro"/>
               </a:rPr>
               <a:t>is</a:t>
             </a:r>
             <a:r>
-              <a:rPr sz="2000" spc="-20" dirty="0">
-                <a:latin typeface="Source Sans Pro"/>
-                <a:cs typeface="Source Sans Pro"/>
-              </a:rPr>
-              <a:t> </a:t>
-            </a:r>
-            <a:r>
-              <a:rPr sz="2000" spc="-119" dirty="0">
+              <a:rPr sz="2400" spc="-20" dirty="0">
+                <a:latin typeface="Source Sans Pro"/>
+                <a:cs typeface="Source Sans Pro"/>
+              </a:rPr>
+              <a:t> </a:t>
+            </a:r>
+            <a:r>
+              <a:rPr sz="2400" spc="-119" dirty="0">
                 <a:latin typeface="Source Sans Pro"/>
                 <a:cs typeface="Source Sans Pro"/>
               </a:rPr>
               <a:t>the</a:t>
             </a:r>
             <a:r>
-              <a:rPr sz="2000" spc="-20" dirty="0">
-                <a:latin typeface="Source Sans Pro"/>
-                <a:cs typeface="Source Sans Pro"/>
-              </a:rPr>
-              <a:t> </a:t>
-            </a:r>
-            <a:r>
-              <a:rPr sz="2000" spc="-109" dirty="0">
+              <a:rPr sz="2400" spc="-20" dirty="0">
+                <a:latin typeface="Source Sans Pro"/>
+                <a:cs typeface="Source Sans Pro"/>
+              </a:rPr>
+              <a:t> </a:t>
+            </a:r>
+            <a:r>
+              <a:rPr sz="2400" spc="-109" dirty="0">
                 <a:latin typeface="Source Sans Pro"/>
                 <a:cs typeface="Source Sans Pro"/>
               </a:rPr>
               <a:t>fraction</a:t>
             </a:r>
             <a:r>
-              <a:rPr sz="2000" spc="-10" dirty="0">
-                <a:latin typeface="Source Sans Pro"/>
-                <a:cs typeface="Source Sans Pro"/>
-              </a:rPr>
-              <a:t> </a:t>
-            </a:r>
-            <a:r>
-              <a:rPr sz="2000" spc="-208" dirty="0">
+              <a:rPr sz="2400" spc="-10" dirty="0">
+                <a:latin typeface="Source Sans Pro"/>
+                <a:cs typeface="Source Sans Pro"/>
+              </a:rPr>
+              <a:t> </a:t>
+            </a:r>
+            <a:r>
+              <a:rPr sz="2400" spc="-208" dirty="0">
                 <a:latin typeface="Source Sans Pro"/>
                 <a:cs typeface="Source Sans Pro"/>
               </a:rPr>
               <a:t>of</a:t>
             </a:r>
             <a:r>
-              <a:rPr sz="2000" spc="30" dirty="0">
-                <a:latin typeface="Source Sans Pro"/>
-                <a:cs typeface="Source Sans Pro"/>
-              </a:rPr>
-              <a:t> </a:t>
-            </a:r>
-            <a:r>
-              <a:rPr sz="2000" spc="-50" dirty="0">
+              <a:rPr sz="2400" spc="30" dirty="0">
+                <a:latin typeface="Source Sans Pro"/>
+                <a:cs typeface="Source Sans Pro"/>
+              </a:rPr>
+              <a:t> </a:t>
+            </a:r>
+            <a:r>
+              <a:rPr sz="2400" spc="-50" dirty="0">
                 <a:latin typeface="Source Sans Pro"/>
                 <a:cs typeface="Source Sans Pro"/>
               </a:rPr>
               <a:t>all </a:t>
             </a:r>
             <a:r>
-              <a:rPr sz="2000" spc="-159" dirty="0">
+              <a:rPr sz="2400" spc="-159" dirty="0">
                 <a:latin typeface="Source Sans Pro"/>
                 <a:cs typeface="Source Sans Pro"/>
               </a:rPr>
               <a:t>outstanding</a:t>
             </a:r>
             <a:r>
-              <a:rPr sz="2000" spc="-20" dirty="0">
-                <a:latin typeface="Source Sans Pro"/>
-                <a:cs typeface="Source Sans Pro"/>
-              </a:rPr>
-              <a:t> </a:t>
-            </a:r>
-            <a:r>
-              <a:rPr sz="2000" spc="-198" dirty="0">
+              <a:rPr sz="2400" spc="-20" dirty="0">
+                <a:latin typeface="Source Sans Pro"/>
+                <a:cs typeface="Source Sans Pro"/>
+              </a:rPr>
+              <a:t> </a:t>
+            </a:r>
+            <a:r>
+              <a:rPr sz="2400" spc="-198" dirty="0">
                 <a:latin typeface="Source Sans Pro"/>
                 <a:cs typeface="Source Sans Pro"/>
               </a:rPr>
               <a:t>shares</a:t>
             </a:r>
             <a:r>
-              <a:rPr sz="2000" spc="30" dirty="0">
-                <a:latin typeface="Source Sans Pro"/>
-                <a:cs typeface="Source Sans Pro"/>
-              </a:rPr>
-              <a:t> </a:t>
-            </a:r>
-            <a:r>
-              <a:rPr sz="2000" spc="-20" dirty="0">
+              <a:rPr sz="2400" spc="30" dirty="0">
+                <a:latin typeface="Source Sans Pro"/>
+                <a:cs typeface="Source Sans Pro"/>
+              </a:rPr>
+              <a:t> </a:t>
+            </a:r>
+            <a:r>
+              <a:rPr sz="2400" spc="-20" dirty="0">
                 <a:latin typeface="Source Sans Pro"/>
                 <a:cs typeface="Source Sans Pro"/>
               </a:rPr>
               <a:t>that</a:t>
             </a:r>
             <a:r>
-              <a:rPr sz="2000" spc="-50" dirty="0">
-                <a:latin typeface="Source Sans Pro"/>
-                <a:cs typeface="Source Sans Pro"/>
-              </a:rPr>
-              <a:t> </a:t>
-            </a:r>
-            <a:r>
-              <a:rPr sz="2000" spc="-139" dirty="0">
+              <a:rPr sz="2400" spc="-50" dirty="0">
+                <a:latin typeface="Source Sans Pro"/>
+                <a:cs typeface="Source Sans Pro"/>
+              </a:rPr>
+              <a:t> </a:t>
+            </a:r>
+            <a:r>
+              <a:rPr sz="2400" spc="-139" dirty="0">
                 <a:latin typeface="Source Sans Pro"/>
                 <a:cs typeface="Source Sans Pro"/>
               </a:rPr>
               <a:t>are</a:t>
             </a:r>
             <a:r>
-              <a:rPr sz="2000" dirty="0">
-                <a:latin typeface="Source Sans Pro"/>
-                <a:cs typeface="Source Sans Pro"/>
-              </a:rPr>
-              <a:t> </a:t>
-            </a:r>
-            <a:r>
-              <a:rPr sz="2000" spc="-129" dirty="0">
+              <a:rPr sz="2400" dirty="0">
+                <a:latin typeface="Source Sans Pro"/>
+                <a:cs typeface="Source Sans Pro"/>
+              </a:rPr>
+              <a:t> </a:t>
+            </a:r>
+            <a:r>
+              <a:rPr sz="2400" spc="-129" dirty="0">
                 <a:latin typeface="Source Sans Pro"/>
                 <a:cs typeface="Source Sans Pro"/>
               </a:rPr>
               <a:t>traded</a:t>
             </a:r>
             <a:r>
-              <a:rPr sz="2000" dirty="0">
-                <a:latin typeface="Source Sans Pro"/>
-                <a:cs typeface="Source Sans Pro"/>
-              </a:rPr>
-              <a:t> </a:t>
-            </a:r>
-            <a:r>
-              <a:rPr sz="2000" spc="-218" dirty="0">
+              <a:rPr sz="2400" dirty="0">
+                <a:latin typeface="Source Sans Pro"/>
+                <a:cs typeface="Source Sans Pro"/>
+              </a:rPr>
+              <a:t> </a:t>
+            </a:r>
+            <a:r>
+              <a:rPr sz="2400" spc="-218" dirty="0">
                 <a:latin typeface="Source Sans Pro"/>
                 <a:cs typeface="Source Sans Pro"/>
               </a:rPr>
               <a:t>on</a:t>
             </a:r>
             <a:r>
-              <a:rPr sz="2000" spc="30" dirty="0">
-                <a:latin typeface="Source Sans Pro"/>
-                <a:cs typeface="Source Sans Pro"/>
-              </a:rPr>
-              <a:t> </a:t>
-            </a:r>
-            <a:r>
-              <a:rPr sz="2000" spc="-20" dirty="0">
+              <a:rPr sz="2400" spc="30" dirty="0">
+                <a:latin typeface="Source Sans Pro"/>
+                <a:cs typeface="Source Sans Pro"/>
+              </a:rPr>
+              <a:t> </a:t>
+            </a:r>
+            <a:r>
+              <a:rPr sz="2400" spc="-20" dirty="0">
                 <a:latin typeface="Source Sans Pro"/>
                 <a:cs typeface="Source Sans Pro"/>
               </a:rPr>
               <a:t>that</a:t>
             </a:r>
             <a:r>
-              <a:rPr sz="2000" dirty="0">
-                <a:latin typeface="Source Sans Pro"/>
-                <a:cs typeface="Source Sans Pro"/>
-              </a:rPr>
-              <a:t> </a:t>
-            </a:r>
-            <a:r>
-              <a:rPr sz="2000" spc="-159" dirty="0">
+              <a:rPr sz="2400" dirty="0">
+                <a:latin typeface="Source Sans Pro"/>
+                <a:cs typeface="Source Sans Pro"/>
+              </a:rPr>
+              <a:t> </a:t>
+            </a:r>
+            <a:r>
+              <a:rPr sz="2400" spc="-159" dirty="0">
                 <a:latin typeface="Source Sans Pro"/>
                 <a:cs typeface="Source Sans Pro"/>
               </a:rPr>
               <a:t>day</a:t>
             </a:r>
             <a:r>
-              <a:rPr lang="en-US" sz="2000" spc="-159" dirty="0">
+              <a:rPr lang="en-US" sz="2400" spc="-159" dirty="0">
                 <a:latin typeface="Source Sans Pro"/>
                 <a:cs typeface="Source Sans Pro"/>
               </a:rPr>
               <a:t> relative to a 100-day moving average of past turnover,</a:t>
             </a:r>
             <a:r>
-              <a:rPr sz="2000" dirty="0">
-                <a:latin typeface="Source Sans Pro"/>
-                <a:cs typeface="Source Sans Pro"/>
-              </a:rPr>
-              <a:t> </a:t>
-            </a:r>
-            <a:r>
-              <a:rPr sz="2000" spc="-226" dirty="0">
+              <a:rPr sz="2400" dirty="0">
+                <a:latin typeface="Source Sans Pro"/>
+                <a:cs typeface="Source Sans Pro"/>
+              </a:rPr>
+              <a:t> </a:t>
+            </a:r>
+            <a:r>
+              <a:rPr sz="2400" spc="-226" dirty="0">
                 <a:latin typeface="Source Sans Pro"/>
                 <a:cs typeface="Source Sans Pro"/>
               </a:rPr>
               <a:t>on</a:t>
             </a:r>
             <a:r>
-              <a:rPr sz="2000" dirty="0">
-                <a:latin typeface="Source Sans Pro"/>
-                <a:cs typeface="Source Sans Pro"/>
-              </a:rPr>
-              <a:t> </a:t>
-            </a:r>
-            <a:r>
-              <a:rPr sz="2000" spc="-149" dirty="0">
+              <a:rPr sz="2400" dirty="0">
+                <a:latin typeface="Source Sans Pro"/>
+                <a:cs typeface="Source Sans Pro"/>
+              </a:rPr>
+              <a:t> </a:t>
+            </a:r>
+            <a:r>
+              <a:rPr sz="2400" spc="-149" dirty="0">
                 <a:latin typeface="Source Sans Pro"/>
                 <a:cs typeface="Source Sans Pro"/>
               </a:rPr>
               <a:t>the</a:t>
             </a:r>
             <a:r>
-              <a:rPr sz="2000" spc="-10" dirty="0">
-                <a:latin typeface="Source Sans Pro"/>
-                <a:cs typeface="Source Sans Pro"/>
-              </a:rPr>
-              <a:t> </a:t>
-            </a:r>
-            <a:r>
-              <a:rPr sz="2000" spc="-208" dirty="0">
+              <a:rPr sz="2400" spc="-10" dirty="0">
+                <a:latin typeface="Source Sans Pro"/>
+                <a:cs typeface="Source Sans Pro"/>
+              </a:rPr>
+              <a:t> </a:t>
+            </a:r>
+            <a:r>
+              <a:rPr sz="2400" spc="-208" dirty="0">
                 <a:latin typeface="Source Sans Pro"/>
                 <a:cs typeface="Source Sans Pro"/>
               </a:rPr>
               <a:t>log</a:t>
             </a:r>
             <a:r>
-              <a:rPr sz="2000" spc="-10" dirty="0">
-                <a:latin typeface="Source Sans Pro"/>
-                <a:cs typeface="Source Sans Pro"/>
-              </a:rPr>
-              <a:t> </a:t>
-            </a:r>
-            <a:r>
-              <a:rPr sz="2000" spc="-119" dirty="0">
+              <a:rPr sz="2400" spc="-10" dirty="0">
+                <a:latin typeface="Source Sans Pro"/>
+                <a:cs typeface="Source Sans Pro"/>
+              </a:rPr>
+              <a:t> </a:t>
+            </a:r>
+            <a:r>
+              <a:rPr sz="2400" spc="-119" dirty="0">
                 <a:latin typeface="Source Sans Pro"/>
                 <a:cs typeface="Source Sans Pro"/>
               </a:rPr>
               <a:t>scale.</a:t>
             </a:r>
-            <a:endParaRPr sz="2000" dirty="0">
+            <a:endParaRPr sz="2400" dirty="0">
               <a:latin typeface="Source Sans Pro"/>
               <a:cs typeface="Source Sans Pro"/>
             </a:endParaRPr>
@@ -7563,7 +7563,7 @@
               </a:tabLst>
             </a:pPr>
             <a:r>
-              <a:rPr sz="2000" spc="-188" dirty="0">
+              <a:rPr sz="2400" spc="-188" dirty="0">
                 <a:solidFill>
                   <a:srgbClr val="990000"/>
                 </a:solidFill>
@@ -7573,7 +7573,7 @@
               <a:t>Dow</a:t>
             </a:r>
             <a:r>
-              <a:rPr sz="2000" spc="-178" dirty="0">
+              <a:rPr sz="2400" spc="-178" dirty="0">
                 <a:solidFill>
                   <a:srgbClr val="990000"/>
                 </a:solidFill>
@@ -7583,7 +7583,7 @@
               <a:t> </a:t>
             </a:r>
             <a:r>
-              <a:rPr sz="2000" spc="-198" dirty="0">
+              <a:rPr sz="2400" spc="-198" dirty="0">
                 <a:solidFill>
                   <a:srgbClr val="990000"/>
                 </a:solidFill>
@@ -7593,7 +7593,7 @@
               <a:t>Jones</a:t>
             </a:r>
             <a:r>
-              <a:rPr sz="2000" spc="-178" dirty="0">
+              <a:rPr sz="2400" spc="-178" dirty="0">
                 <a:solidFill>
                   <a:srgbClr val="990000"/>
                 </a:solidFill>
@@ -7603,7 +7603,7 @@
               <a:t> </a:t>
             </a:r>
             <a:r>
-              <a:rPr sz="2000" spc="-139" dirty="0">
+              <a:rPr sz="2400" spc="-139" dirty="0">
                 <a:solidFill>
                   <a:srgbClr val="990000"/>
                 </a:solidFill>
@@ -7613,230 +7613,230 @@
               <a:t>return</a:t>
             </a:r>
             <a:r>
-              <a:rPr sz="2000" spc="-139" dirty="0">
+              <a:rPr sz="2400" spc="-139" dirty="0">
                 <a:latin typeface="Source Sans Pro"/>
                 <a:cs typeface="Source Sans Pro"/>
               </a:rPr>
               <a:t>.</a:t>
             </a:r>
             <a:r>
-              <a:rPr sz="2000" spc="79" dirty="0">
-                <a:latin typeface="Source Sans Pro"/>
-                <a:cs typeface="Source Sans Pro"/>
-              </a:rPr>
-              <a:t> </a:t>
-            </a:r>
-            <a:r>
-              <a:rPr sz="2000" spc="-40" dirty="0">
+              <a:rPr sz="2400" spc="79" dirty="0">
+                <a:latin typeface="Source Sans Pro"/>
+                <a:cs typeface="Source Sans Pro"/>
+              </a:rPr>
+              <a:t> </a:t>
+            </a:r>
+            <a:r>
+              <a:rPr sz="2400" spc="-40" dirty="0">
                 <a:latin typeface="Source Sans Pro"/>
                 <a:cs typeface="Source Sans Pro"/>
               </a:rPr>
               <a:t>This</a:t>
             </a:r>
             <a:r>
-              <a:rPr sz="2000" dirty="0">
-                <a:latin typeface="Source Sans Pro"/>
-                <a:cs typeface="Source Sans Pro"/>
-              </a:rPr>
-              <a:t> </a:t>
-            </a:r>
-            <a:r>
-              <a:rPr sz="2000" spc="-99" dirty="0">
+              <a:rPr sz="2400" dirty="0">
+                <a:latin typeface="Source Sans Pro"/>
+                <a:cs typeface="Source Sans Pro"/>
+              </a:rPr>
+              <a:t> </a:t>
+            </a:r>
+            <a:r>
+              <a:rPr sz="2400" spc="-99" dirty="0">
                 <a:latin typeface="Source Sans Pro"/>
                 <a:cs typeface="Source Sans Pro"/>
               </a:rPr>
               <a:t>is</a:t>
             </a:r>
             <a:r>
-              <a:rPr sz="2000" dirty="0">
-                <a:latin typeface="Source Sans Pro"/>
-                <a:cs typeface="Source Sans Pro"/>
-              </a:rPr>
-              <a:t> </a:t>
-            </a:r>
-            <a:r>
-              <a:rPr sz="2000" spc="-119" dirty="0">
+              <a:rPr sz="2400" dirty="0">
+                <a:latin typeface="Source Sans Pro"/>
+                <a:cs typeface="Source Sans Pro"/>
+              </a:rPr>
+              <a:t> </a:t>
+            </a:r>
+            <a:r>
+              <a:rPr sz="2400" spc="-119" dirty="0">
                 <a:latin typeface="Source Sans Pro"/>
                 <a:cs typeface="Source Sans Pro"/>
               </a:rPr>
               <a:t>the</a:t>
             </a:r>
             <a:r>
-              <a:rPr sz="2000" dirty="0">
-                <a:latin typeface="Source Sans Pro"/>
-                <a:cs typeface="Source Sans Pro"/>
-              </a:rPr>
-              <a:t> </a:t>
-            </a:r>
-            <a:r>
-              <a:rPr lang="en-US" sz="2000" spc="-268" dirty="0">
+              <a:rPr sz="2400" dirty="0">
+                <a:latin typeface="Source Sans Pro"/>
+                <a:cs typeface="Source Sans Pro"/>
+              </a:rPr>
+              <a:t> </a:t>
+            </a:r>
+            <a:r>
+              <a:rPr lang="en-US" sz="2400" spc="-268" dirty="0">
                 <a:latin typeface="Source Sans Pro"/>
                 <a:cs typeface="Source Sans Pro"/>
               </a:rPr>
               <a:t>difference</a:t>
             </a:r>
             <a:r>
-              <a:rPr sz="2000" spc="30" dirty="0">
-                <a:latin typeface="Source Sans Pro"/>
-                <a:cs typeface="Source Sans Pro"/>
-              </a:rPr>
-              <a:t> </a:t>
-            </a:r>
-            <a:r>
-              <a:rPr sz="2000" spc="-188" dirty="0">
+              <a:rPr sz="2400" spc="30" dirty="0">
+                <a:latin typeface="Source Sans Pro"/>
+                <a:cs typeface="Source Sans Pro"/>
+              </a:rPr>
+              <a:t> </a:t>
+            </a:r>
+            <a:r>
+              <a:rPr sz="2400" spc="-188" dirty="0">
                 <a:latin typeface="Source Sans Pro"/>
                 <a:cs typeface="Source Sans Pro"/>
               </a:rPr>
               <a:t>between</a:t>
             </a:r>
             <a:r>
-              <a:rPr sz="2000" spc="10" dirty="0">
-                <a:latin typeface="Source Sans Pro"/>
-                <a:cs typeface="Source Sans Pro"/>
-              </a:rPr>
-              <a:t> </a:t>
-            </a:r>
-            <a:r>
-              <a:rPr sz="2000" spc="-119" dirty="0">
+              <a:rPr sz="2400" spc="10" dirty="0">
+                <a:latin typeface="Source Sans Pro"/>
+                <a:cs typeface="Source Sans Pro"/>
+              </a:rPr>
+              <a:t> </a:t>
+            </a:r>
+            <a:r>
+              <a:rPr sz="2400" spc="-119" dirty="0">
                 <a:latin typeface="Source Sans Pro"/>
                 <a:cs typeface="Source Sans Pro"/>
               </a:rPr>
               <a:t>the</a:t>
             </a:r>
             <a:r>
-              <a:rPr sz="2000" dirty="0">
-                <a:latin typeface="Source Sans Pro"/>
-                <a:cs typeface="Source Sans Pro"/>
-              </a:rPr>
-              <a:t> </a:t>
-            </a:r>
-            <a:r>
-              <a:rPr sz="2000" spc="-99" dirty="0">
+              <a:rPr sz="2400" dirty="0">
+                <a:latin typeface="Source Sans Pro"/>
+                <a:cs typeface="Source Sans Pro"/>
+              </a:rPr>
+              <a:t> </a:t>
+            </a:r>
+            <a:r>
+              <a:rPr sz="2400" spc="-99" dirty="0">
                 <a:latin typeface="Source Sans Pro"/>
                 <a:cs typeface="Source Sans Pro"/>
               </a:rPr>
               <a:t>log </a:t>
             </a:r>
             <a:r>
-              <a:rPr sz="2000" spc="-208" dirty="0">
+              <a:rPr sz="2400" spc="-208" dirty="0">
                 <a:latin typeface="Source Sans Pro"/>
                 <a:cs typeface="Source Sans Pro"/>
               </a:rPr>
               <a:t>of</a:t>
             </a:r>
             <a:r>
-              <a:rPr sz="2000" spc="30" dirty="0">
-                <a:latin typeface="Source Sans Pro"/>
-                <a:cs typeface="Source Sans Pro"/>
-              </a:rPr>
-              <a:t> </a:t>
-            </a:r>
-            <a:r>
-              <a:rPr sz="2000" spc="-119" dirty="0">
+              <a:rPr sz="2400" spc="30" dirty="0">
+                <a:latin typeface="Source Sans Pro"/>
+                <a:cs typeface="Source Sans Pro"/>
+              </a:rPr>
+              <a:t> </a:t>
+            </a:r>
+            <a:r>
+              <a:rPr sz="2400" spc="-119" dirty="0">
                 <a:latin typeface="Source Sans Pro"/>
                 <a:cs typeface="Source Sans Pro"/>
               </a:rPr>
               <a:t>the</a:t>
             </a:r>
             <a:r>
-              <a:rPr sz="2000" spc="-59" dirty="0">
-                <a:latin typeface="Source Sans Pro"/>
-                <a:cs typeface="Source Sans Pro"/>
-              </a:rPr>
-              <a:t> </a:t>
-            </a:r>
-            <a:r>
-              <a:rPr sz="2000" spc="-129" dirty="0">
+              <a:rPr sz="2400" spc="-59" dirty="0">
+                <a:latin typeface="Source Sans Pro"/>
+                <a:cs typeface="Source Sans Pro"/>
+              </a:rPr>
+              <a:t> </a:t>
+            </a:r>
+            <a:r>
+              <a:rPr sz="2400" spc="-129" dirty="0">
                 <a:latin typeface="Source Sans Pro"/>
                 <a:cs typeface="Source Sans Pro"/>
               </a:rPr>
               <a:t>Dow</a:t>
             </a:r>
             <a:r>
-              <a:rPr sz="2000" spc="-30" dirty="0">
-                <a:latin typeface="Source Sans Pro"/>
-                <a:cs typeface="Source Sans Pro"/>
-              </a:rPr>
-              <a:t> </a:t>
-            </a:r>
-            <a:r>
-              <a:rPr sz="2000" spc="-99" dirty="0">
+              <a:rPr sz="2400" spc="-30" dirty="0">
+                <a:latin typeface="Source Sans Pro"/>
+                <a:cs typeface="Source Sans Pro"/>
+              </a:rPr>
+              <a:t> </a:t>
+            </a:r>
+            <a:r>
+              <a:rPr sz="2400" spc="-99" dirty="0">
                 <a:latin typeface="Source Sans Pro"/>
                 <a:cs typeface="Source Sans Pro"/>
               </a:rPr>
               <a:t>Jones</a:t>
             </a:r>
             <a:r>
-              <a:rPr sz="2000" dirty="0">
-                <a:latin typeface="Source Sans Pro"/>
-                <a:cs typeface="Source Sans Pro"/>
-              </a:rPr>
-              <a:t> </a:t>
-            </a:r>
-            <a:r>
-              <a:rPr sz="2000" spc="-79" dirty="0">
+              <a:rPr sz="2400" dirty="0">
+                <a:latin typeface="Source Sans Pro"/>
+                <a:cs typeface="Source Sans Pro"/>
+              </a:rPr>
+              <a:t> </a:t>
+            </a:r>
+            <a:r>
+              <a:rPr sz="2400" spc="-79" dirty="0">
                 <a:latin typeface="Source Sans Pro"/>
                 <a:cs typeface="Source Sans Pro"/>
               </a:rPr>
               <a:t>Industrial</a:t>
             </a:r>
             <a:r>
-              <a:rPr sz="2000" spc="-10" dirty="0">
-                <a:latin typeface="Source Sans Pro"/>
-                <a:cs typeface="Source Sans Pro"/>
-              </a:rPr>
-              <a:t> </a:t>
-            </a:r>
-            <a:r>
-              <a:rPr sz="2000" spc="-119" dirty="0">
+              <a:rPr sz="2400" spc="-10" dirty="0">
+                <a:latin typeface="Source Sans Pro"/>
+                <a:cs typeface="Source Sans Pro"/>
+              </a:rPr>
+              <a:t> </a:t>
+            </a:r>
+            <a:r>
+              <a:rPr sz="2400" spc="-119" dirty="0">
                 <a:latin typeface="Source Sans Pro"/>
                 <a:cs typeface="Source Sans Pro"/>
               </a:rPr>
               <a:t>Index</a:t>
             </a:r>
             <a:r>
-              <a:rPr sz="2000" spc="-10" dirty="0">
-                <a:latin typeface="Source Sans Pro"/>
-                <a:cs typeface="Source Sans Pro"/>
-              </a:rPr>
-              <a:t> </a:t>
-            </a:r>
-            <a:r>
-              <a:rPr sz="2000" spc="-218" dirty="0">
+              <a:rPr sz="2400" spc="-10" dirty="0">
+                <a:latin typeface="Source Sans Pro"/>
+                <a:cs typeface="Source Sans Pro"/>
+              </a:rPr>
+              <a:t> </a:t>
+            </a:r>
+            <a:r>
+              <a:rPr sz="2400" spc="-218" dirty="0">
                 <a:latin typeface="Source Sans Pro"/>
                 <a:cs typeface="Source Sans Pro"/>
               </a:rPr>
               <a:t>on</a:t>
             </a:r>
             <a:r>
-              <a:rPr sz="2000" spc="30" dirty="0">
-                <a:latin typeface="Source Sans Pro"/>
-                <a:cs typeface="Source Sans Pro"/>
-              </a:rPr>
-              <a:t> </a:t>
-            </a:r>
-            <a:r>
-              <a:rPr sz="2000" spc="-159" dirty="0">
+              <a:rPr sz="2400" spc="30" dirty="0">
+                <a:latin typeface="Source Sans Pro"/>
+                <a:cs typeface="Source Sans Pro"/>
+              </a:rPr>
+              <a:t> </a:t>
+            </a:r>
+            <a:r>
+              <a:rPr sz="2400" spc="-159" dirty="0">
                 <a:latin typeface="Source Sans Pro"/>
                 <a:cs typeface="Source Sans Pro"/>
               </a:rPr>
               <a:t>consecutive</a:t>
             </a:r>
             <a:r>
-              <a:rPr sz="2000" dirty="0">
-                <a:latin typeface="Source Sans Pro"/>
-                <a:cs typeface="Source Sans Pro"/>
-              </a:rPr>
-              <a:t> </a:t>
-            </a:r>
-            <a:r>
-              <a:rPr sz="2000" spc="-20" dirty="0">
+              <a:rPr sz="2400" dirty="0">
+                <a:latin typeface="Source Sans Pro"/>
+                <a:cs typeface="Source Sans Pro"/>
+              </a:rPr>
+              <a:t> </a:t>
+            </a:r>
+            <a:r>
+              <a:rPr sz="2400" spc="-20" dirty="0">
                 <a:latin typeface="Source Sans Pro"/>
                 <a:cs typeface="Source Sans Pro"/>
               </a:rPr>
               <a:t>trading days.</a:t>
             </a:r>
-            <a:endParaRPr sz="2000" dirty="0">
+            <a:endParaRPr sz="2400" dirty="0">
               <a:latin typeface="Source Sans Pro"/>
               <a:cs typeface="Source Sans Pro"/>
             </a:endParaRPr>
@@ -7859,7 +7859,7 @@
               </a:tabLst>
             </a:pPr>
             <a:r>
-              <a:rPr sz="2000" spc="-188" dirty="0">
+              <a:rPr sz="2400" spc="-188" dirty="0">
                 <a:solidFill>
                   <a:srgbClr val="990000"/>
                 </a:solidFill>
@@ -7869,7 +7869,7 @@
               <a:t>Log</a:t>
             </a:r>
             <a:r>
-              <a:rPr sz="2000" spc="-178" dirty="0">
+              <a:rPr sz="2400" spc="-178" dirty="0">
                 <a:solidFill>
                   <a:srgbClr val="990000"/>
                 </a:solidFill>
@@ -7879,7 +7879,7 @@
               <a:t> </a:t>
             </a:r>
             <a:r>
-              <a:rPr sz="2000" spc="-159" dirty="0">
+              <a:rPr sz="2400" spc="-159" dirty="0">
                 <a:solidFill>
                   <a:srgbClr val="990000"/>
                 </a:solidFill>
@@ -7889,160 +7889,160 @@
               <a:t>volatility</a:t>
             </a:r>
             <a:r>
-              <a:rPr sz="2000" spc="-159" dirty="0">
+              <a:rPr sz="2400" spc="-159" dirty="0">
                 <a:latin typeface="Source Sans Pro"/>
                 <a:cs typeface="Source Sans Pro"/>
               </a:rPr>
               <a:t>.</a:t>
             </a:r>
             <a:r>
-              <a:rPr sz="2000" spc="89" dirty="0">
-                <a:latin typeface="Source Sans Pro"/>
-                <a:cs typeface="Source Sans Pro"/>
-              </a:rPr>
-              <a:t> </a:t>
-            </a:r>
-            <a:r>
-              <a:rPr sz="2000" spc="-40" dirty="0">
+              <a:rPr sz="2400" spc="89" dirty="0">
+                <a:latin typeface="Source Sans Pro"/>
+                <a:cs typeface="Source Sans Pro"/>
+              </a:rPr>
+              <a:t> </a:t>
+            </a:r>
+            <a:r>
+              <a:rPr sz="2400" spc="-40" dirty="0">
                 <a:latin typeface="Source Sans Pro"/>
                 <a:cs typeface="Source Sans Pro"/>
               </a:rPr>
               <a:t>This</a:t>
             </a:r>
             <a:r>
-              <a:rPr sz="2000" dirty="0">
-                <a:latin typeface="Source Sans Pro"/>
-                <a:cs typeface="Source Sans Pro"/>
-              </a:rPr>
-              <a:t> </a:t>
-            </a:r>
-            <a:r>
-              <a:rPr sz="2000" spc="-99" dirty="0">
+              <a:rPr sz="2400" dirty="0">
+                <a:latin typeface="Source Sans Pro"/>
+                <a:cs typeface="Source Sans Pro"/>
+              </a:rPr>
+              <a:t> </a:t>
+            </a:r>
+            <a:r>
+              <a:rPr sz="2400" spc="-99" dirty="0">
                 <a:latin typeface="Source Sans Pro"/>
                 <a:cs typeface="Source Sans Pro"/>
               </a:rPr>
               <a:t>is</a:t>
             </a:r>
             <a:r>
-              <a:rPr sz="2000" spc="-10" dirty="0">
-                <a:latin typeface="Source Sans Pro"/>
-                <a:cs typeface="Source Sans Pro"/>
-              </a:rPr>
-              <a:t> </a:t>
-            </a:r>
-            <a:r>
-              <a:rPr sz="2000" spc="-208" dirty="0">
+              <a:rPr sz="2400" spc="-10" dirty="0">
+                <a:latin typeface="Source Sans Pro"/>
+                <a:cs typeface="Source Sans Pro"/>
+              </a:rPr>
+              <a:t> </a:t>
+            </a:r>
+            <a:r>
+              <a:rPr sz="2400" spc="-208" dirty="0">
                 <a:latin typeface="Source Sans Pro"/>
                 <a:cs typeface="Source Sans Pro"/>
               </a:rPr>
               <a:t>based</a:t>
             </a:r>
             <a:r>
-              <a:rPr sz="2000" spc="30" dirty="0">
-                <a:latin typeface="Source Sans Pro"/>
-                <a:cs typeface="Source Sans Pro"/>
-              </a:rPr>
-              <a:t> </a:t>
-            </a:r>
-            <a:r>
-              <a:rPr sz="2000" spc="-218" dirty="0">
+              <a:rPr sz="2400" spc="30" dirty="0">
+                <a:latin typeface="Source Sans Pro"/>
+                <a:cs typeface="Source Sans Pro"/>
+              </a:rPr>
+              <a:t> </a:t>
+            </a:r>
+            <a:r>
+              <a:rPr sz="2400" spc="-218" dirty="0">
                 <a:latin typeface="Source Sans Pro"/>
                 <a:cs typeface="Source Sans Pro"/>
               </a:rPr>
               <a:t>on</a:t>
             </a:r>
             <a:r>
-              <a:rPr sz="2000" spc="30" dirty="0">
-                <a:latin typeface="Source Sans Pro"/>
-                <a:cs typeface="Source Sans Pro"/>
-              </a:rPr>
-              <a:t> </a:t>
-            </a:r>
-            <a:r>
-              <a:rPr sz="2000" spc="-119" dirty="0">
+              <a:rPr sz="2400" spc="30" dirty="0">
+                <a:latin typeface="Source Sans Pro"/>
+                <a:cs typeface="Source Sans Pro"/>
+              </a:rPr>
+              <a:t> </a:t>
+            </a:r>
+            <a:r>
+              <a:rPr sz="2400" spc="-119" dirty="0">
                 <a:latin typeface="Source Sans Pro"/>
                 <a:cs typeface="Source Sans Pro"/>
               </a:rPr>
               <a:t>the</a:t>
             </a:r>
             <a:r>
-              <a:rPr sz="2000" spc="-10" dirty="0">
-                <a:latin typeface="Source Sans Pro"/>
-                <a:cs typeface="Source Sans Pro"/>
-              </a:rPr>
-              <a:t> </a:t>
-            </a:r>
-            <a:r>
-              <a:rPr sz="2000" spc="-168" dirty="0">
+              <a:rPr sz="2400" spc="-10" dirty="0">
+                <a:latin typeface="Source Sans Pro"/>
+                <a:cs typeface="Source Sans Pro"/>
+              </a:rPr>
+              <a:t> </a:t>
+            </a:r>
+            <a:r>
+              <a:rPr sz="2400" spc="-168" dirty="0">
                 <a:latin typeface="Source Sans Pro"/>
                 <a:cs typeface="Source Sans Pro"/>
               </a:rPr>
               <a:t>absolute</a:t>
             </a:r>
             <a:r>
-              <a:rPr sz="2000" dirty="0">
-                <a:latin typeface="Source Sans Pro"/>
-                <a:cs typeface="Source Sans Pro"/>
-              </a:rPr>
-              <a:t> </a:t>
-            </a:r>
-            <a:r>
-              <a:rPr sz="2000" spc="-159" dirty="0">
+              <a:rPr sz="2400" dirty="0">
+                <a:latin typeface="Source Sans Pro"/>
+                <a:cs typeface="Source Sans Pro"/>
+              </a:rPr>
+              <a:t> </a:t>
+            </a:r>
+            <a:r>
+              <a:rPr sz="2400" spc="-159" dirty="0">
                 <a:latin typeface="Source Sans Pro"/>
                 <a:cs typeface="Source Sans Pro"/>
               </a:rPr>
               <a:t>values</a:t>
             </a:r>
             <a:r>
-              <a:rPr sz="2000" spc="-10" dirty="0">
-                <a:latin typeface="Source Sans Pro"/>
-                <a:cs typeface="Source Sans Pro"/>
-              </a:rPr>
-              <a:t> </a:t>
-            </a:r>
-            <a:r>
-              <a:rPr sz="2000" spc="-69" dirty="0">
+              <a:rPr sz="2400" spc="-10" dirty="0">
+                <a:latin typeface="Source Sans Pro"/>
+                <a:cs typeface="Source Sans Pro"/>
+              </a:rPr>
+              <a:t> </a:t>
+            </a:r>
+            <a:r>
+              <a:rPr sz="2400" spc="-69" dirty="0">
                 <a:latin typeface="Source Sans Pro"/>
                 <a:cs typeface="Source Sans Pro"/>
               </a:rPr>
               <a:t>of </a:t>
             </a:r>
             <a:r>
-              <a:rPr sz="2000" spc="-50" dirty="0">
+              <a:rPr sz="2400" spc="-50" dirty="0">
                 <a:latin typeface="Source Sans Pro"/>
                 <a:cs typeface="Source Sans Pro"/>
               </a:rPr>
               <a:t>daily</a:t>
             </a:r>
             <a:r>
-              <a:rPr sz="2000" spc="-69" dirty="0">
-                <a:latin typeface="Source Sans Pro"/>
-                <a:cs typeface="Source Sans Pro"/>
-              </a:rPr>
-              <a:t> </a:t>
-            </a:r>
-            <a:r>
-              <a:rPr sz="2000" spc="-129" dirty="0">
+              <a:rPr sz="2400" spc="-69" dirty="0">
+                <a:latin typeface="Source Sans Pro"/>
+                <a:cs typeface="Source Sans Pro"/>
+              </a:rPr>
+              <a:t> </a:t>
+            </a:r>
+            <a:r>
+              <a:rPr sz="2400" spc="-129" dirty="0">
                 <a:latin typeface="Source Sans Pro"/>
                 <a:cs typeface="Source Sans Pro"/>
               </a:rPr>
               <a:t>price</a:t>
             </a:r>
             <a:r>
-              <a:rPr sz="2000" spc="-50" dirty="0">
-                <a:latin typeface="Source Sans Pro"/>
-                <a:cs typeface="Source Sans Pro"/>
-              </a:rPr>
-              <a:t> </a:t>
-            </a:r>
-            <a:r>
-              <a:rPr sz="2000" spc="-20" dirty="0">
+              <a:rPr sz="2400" spc="-50" dirty="0">
+                <a:latin typeface="Source Sans Pro"/>
+                <a:cs typeface="Source Sans Pro"/>
+              </a:rPr>
+              <a:t> </a:t>
+            </a:r>
+            <a:r>
+              <a:rPr sz="2400" spc="-20" dirty="0">
                 <a:latin typeface="Source Sans Pro"/>
                 <a:cs typeface="Source Sans Pro"/>
               </a:rPr>
               <a:t>movements.</a:t>
             </a:r>
-            <a:endParaRPr sz="2000" dirty="0">
+            <a:endParaRPr sz="2400" dirty="0">
               <a:latin typeface="Source Sans Pro"/>
               <a:cs typeface="Source Sans Pro"/>
             </a:endParaRPr>
@@ -8057,35 +8057,35 @@
               </a:spcBef>
             </a:pPr>
             <a:r>
-              <a:rPr sz="2000" spc="-20" dirty="0">
+              <a:rPr sz="2400" spc="-20" dirty="0">
                 <a:latin typeface="Source Sans Pro"/>
                 <a:cs typeface="Source Sans Pro"/>
               </a:rPr>
               <a:t>Goal:</a:t>
             </a:r>
             <a:r>
-              <a:rPr sz="2000" spc="208" dirty="0">
-                <a:latin typeface="Source Sans Pro"/>
-                <a:cs typeface="Source Sans Pro"/>
-              </a:rPr>
-              <a:t> </a:t>
-            </a:r>
-            <a:r>
-              <a:rPr sz="2000" spc="-109" dirty="0">
+              <a:rPr sz="2400" spc="208" dirty="0">
+                <a:latin typeface="Source Sans Pro"/>
+                <a:cs typeface="Source Sans Pro"/>
+              </a:rPr>
+              <a:t> </a:t>
+            </a:r>
+            <a:r>
+              <a:rPr sz="2400" spc="-109" dirty="0">
                 <a:latin typeface="Source Sans Pro"/>
                 <a:cs typeface="Source Sans Pro"/>
               </a:rPr>
               <a:t>predict</a:t>
             </a:r>
             <a:r>
-              <a:rPr sz="2000" spc="20" dirty="0">
-                <a:latin typeface="Source Sans Pro"/>
-                <a:cs typeface="Source Sans Pro"/>
-              </a:rPr>
-              <a:t> </a:t>
-            </a:r>
-            <a:r>
-              <a:rPr sz="2000" spc="-188" dirty="0">
+              <a:rPr sz="2400" spc="20" dirty="0">
+                <a:latin typeface="Source Sans Pro"/>
+                <a:cs typeface="Source Sans Pro"/>
+              </a:rPr>
+              <a:t> </a:t>
+            </a:r>
+            <a:r>
+              <a:rPr sz="2400" spc="-188" dirty="0">
                 <a:solidFill>
                   <a:srgbClr val="990000"/>
                 </a:solidFill>
@@ -8095,7 +8095,7 @@
               <a:t>Log</a:t>
             </a:r>
             <a:r>
-              <a:rPr sz="2000" spc="-178" dirty="0">
+              <a:rPr sz="2400" spc="-178" dirty="0">
                 <a:solidFill>
                   <a:srgbClr val="990000"/>
                 </a:solidFill>
@@ -8105,7 +8105,7 @@
               <a:t> </a:t>
             </a:r>
             <a:r>
-              <a:rPr sz="2000" spc="-198" dirty="0">
+              <a:rPr sz="2400" spc="-198" dirty="0">
                 <a:solidFill>
                   <a:srgbClr val="990000"/>
                 </a:solidFill>
@@ -8115,7 +8115,7 @@
               <a:t>trading</a:t>
             </a:r>
             <a:r>
-              <a:rPr sz="2000" spc="-178" dirty="0">
+              <a:rPr sz="2400" spc="-178" dirty="0">
                 <a:solidFill>
                   <a:srgbClr val="990000"/>
                 </a:solidFill>
@@ -8125,7 +8125,7 @@
               <a:t> </a:t>
             </a:r>
             <a:r>
-              <a:rPr sz="2000" spc="-198" dirty="0">
+              <a:rPr sz="2400" spc="-198" dirty="0">
                 <a:solidFill>
                   <a:srgbClr val="990000"/>
                 </a:solidFill>
@@ -8135,7 +8135,7 @@
               <a:t>volume</a:t>
             </a:r>
             <a:r>
-              <a:rPr sz="2000" spc="-595" dirty="0">
+              <a:rPr sz="2400" spc="-595" dirty="0">
                 <a:solidFill>
                   <a:srgbClr val="990000"/>
                 </a:solidFill>
@@ -8145,182 +8145,182 @@
               <a:t> </a:t>
             </a:r>
             <a:r>
-              <a:rPr sz="2000" spc="-168" dirty="0">
+              <a:rPr sz="2400" spc="-168" dirty="0">
                 <a:latin typeface="Source Sans Pro"/>
                 <a:cs typeface="Source Sans Pro"/>
               </a:rPr>
               <a:t>tomorrow,</a:t>
             </a:r>
             <a:r>
-              <a:rPr sz="2000" spc="20" dirty="0">
-                <a:latin typeface="Source Sans Pro"/>
-                <a:cs typeface="Source Sans Pro"/>
-              </a:rPr>
-              <a:t> </a:t>
-            </a:r>
-            <a:r>
-              <a:rPr sz="2000" spc="-159" dirty="0">
+              <a:rPr sz="2400" spc="20" dirty="0">
+                <a:latin typeface="Source Sans Pro"/>
+                <a:cs typeface="Source Sans Pro"/>
+              </a:rPr>
+              <a:t> </a:t>
+            </a:r>
+            <a:r>
+              <a:rPr sz="2400" spc="-159" dirty="0">
                 <a:latin typeface="Source Sans Pro"/>
                 <a:cs typeface="Source Sans Pro"/>
               </a:rPr>
               <a:t>given</a:t>
             </a:r>
             <a:r>
-              <a:rPr sz="2000" spc="20" dirty="0">
-                <a:latin typeface="Source Sans Pro"/>
-                <a:cs typeface="Source Sans Pro"/>
-              </a:rPr>
-              <a:t> </a:t>
-            </a:r>
-            <a:r>
-              <a:rPr sz="2000" spc="-50" dirty="0">
+              <a:rPr sz="2400" spc="20" dirty="0">
+                <a:latin typeface="Source Sans Pro"/>
+                <a:cs typeface="Source Sans Pro"/>
+              </a:rPr>
+              <a:t> </a:t>
+            </a:r>
+            <a:r>
+              <a:rPr sz="2400" spc="-50" dirty="0">
                 <a:latin typeface="Source Sans Pro"/>
                 <a:cs typeface="Source Sans Pro"/>
               </a:rPr>
               <a:t>its </a:t>
             </a:r>
             <a:r>
-              <a:rPr sz="2000" spc="-198" dirty="0">
+              <a:rPr sz="2400" spc="-198" dirty="0">
                 <a:latin typeface="Source Sans Pro"/>
                 <a:cs typeface="Source Sans Pro"/>
               </a:rPr>
               <a:t>observed</a:t>
             </a:r>
             <a:r>
-              <a:rPr sz="2000" dirty="0">
-                <a:latin typeface="Source Sans Pro"/>
-                <a:cs typeface="Source Sans Pro"/>
-              </a:rPr>
-              <a:t> </a:t>
-            </a:r>
-            <a:r>
-              <a:rPr sz="2000" spc="-168" dirty="0">
+              <a:rPr sz="2400" dirty="0">
+                <a:latin typeface="Source Sans Pro"/>
+                <a:cs typeface="Source Sans Pro"/>
+              </a:rPr>
+              <a:t> </a:t>
+            </a:r>
+            <a:r>
+              <a:rPr sz="2400" spc="-168" dirty="0">
                 <a:latin typeface="Source Sans Pro"/>
                 <a:cs typeface="Source Sans Pro"/>
               </a:rPr>
               <a:t>values</a:t>
             </a:r>
             <a:r>
-              <a:rPr sz="2000" dirty="0">
-                <a:latin typeface="Source Sans Pro"/>
-                <a:cs typeface="Source Sans Pro"/>
-              </a:rPr>
-              <a:t> </a:t>
-            </a:r>
-            <a:r>
-              <a:rPr sz="2000" spc="-139" dirty="0">
+              <a:rPr sz="2400" dirty="0">
+                <a:latin typeface="Source Sans Pro"/>
+                <a:cs typeface="Source Sans Pro"/>
+              </a:rPr>
+              <a:t> </a:t>
+            </a:r>
+            <a:r>
+              <a:rPr sz="2400" spc="-139" dirty="0">
                 <a:latin typeface="Source Sans Pro"/>
                 <a:cs typeface="Source Sans Pro"/>
               </a:rPr>
               <a:t>up</a:t>
             </a:r>
             <a:r>
-              <a:rPr sz="2000" spc="-10" dirty="0">
-                <a:latin typeface="Source Sans Pro"/>
-                <a:cs typeface="Source Sans Pro"/>
-              </a:rPr>
-              <a:t> </a:t>
-            </a:r>
-            <a:r>
-              <a:rPr sz="2000" spc="-59" dirty="0">
+              <a:rPr sz="2400" spc="-10" dirty="0">
+                <a:latin typeface="Source Sans Pro"/>
+                <a:cs typeface="Source Sans Pro"/>
+              </a:rPr>
+              <a:t> </a:t>
+            </a:r>
+            <a:r>
+              <a:rPr sz="2400" spc="-59" dirty="0">
                 <a:latin typeface="Source Sans Pro"/>
                 <a:cs typeface="Source Sans Pro"/>
               </a:rPr>
               <a:t>to</a:t>
             </a:r>
             <a:r>
-              <a:rPr sz="2000" spc="20" dirty="0">
-                <a:latin typeface="Source Sans Pro"/>
-                <a:cs typeface="Source Sans Pro"/>
-              </a:rPr>
-              <a:t> </a:t>
-            </a:r>
-            <a:r>
-              <a:rPr sz="2000" spc="-139" dirty="0">
+              <a:rPr sz="2400" spc="20" dirty="0">
+                <a:latin typeface="Source Sans Pro"/>
+                <a:cs typeface="Source Sans Pro"/>
+              </a:rPr>
+              <a:t> </a:t>
+            </a:r>
+            <a:r>
+              <a:rPr sz="2400" spc="-139" dirty="0">
                 <a:latin typeface="Source Sans Pro"/>
                 <a:cs typeface="Source Sans Pro"/>
               </a:rPr>
               <a:t>today,</a:t>
             </a:r>
             <a:r>
-              <a:rPr sz="2000" spc="20" dirty="0">
-                <a:latin typeface="Source Sans Pro"/>
-                <a:cs typeface="Source Sans Pro"/>
-              </a:rPr>
-              <a:t> </a:t>
-            </a:r>
-            <a:r>
-              <a:rPr sz="2000" spc="-198" dirty="0">
+              <a:rPr sz="2400" spc="20" dirty="0">
+                <a:latin typeface="Source Sans Pro"/>
+                <a:cs typeface="Source Sans Pro"/>
+              </a:rPr>
+              <a:t> </a:t>
+            </a:r>
+            <a:r>
+              <a:rPr sz="2400" spc="-198" dirty="0">
                 <a:latin typeface="Source Sans Pro"/>
                 <a:cs typeface="Source Sans Pro"/>
               </a:rPr>
               <a:t>as</a:t>
             </a:r>
             <a:r>
-              <a:rPr sz="2000" spc="30" dirty="0">
-                <a:latin typeface="Source Sans Pro"/>
-                <a:cs typeface="Source Sans Pro"/>
-              </a:rPr>
-              <a:t> </a:t>
-            </a:r>
-            <a:r>
-              <a:rPr sz="2000" spc="-119" dirty="0">
+              <a:rPr sz="2400" spc="30" dirty="0">
+                <a:latin typeface="Source Sans Pro"/>
+                <a:cs typeface="Source Sans Pro"/>
+              </a:rPr>
+              <a:t> </a:t>
+            </a:r>
+            <a:r>
+              <a:rPr sz="2400" spc="-119" dirty="0">
                 <a:latin typeface="Source Sans Pro"/>
                 <a:cs typeface="Source Sans Pro"/>
               </a:rPr>
               <a:t>well</a:t>
             </a:r>
             <a:r>
-              <a:rPr sz="2000" spc="20" dirty="0">
-                <a:latin typeface="Source Sans Pro"/>
-                <a:cs typeface="Source Sans Pro"/>
-              </a:rPr>
-              <a:t> </a:t>
-            </a:r>
-            <a:r>
-              <a:rPr sz="2000" spc="-198" dirty="0">
+              <a:rPr sz="2400" spc="20" dirty="0">
+                <a:latin typeface="Source Sans Pro"/>
+                <a:cs typeface="Source Sans Pro"/>
+              </a:rPr>
+              <a:t> </a:t>
+            </a:r>
+            <a:r>
+              <a:rPr sz="2400" spc="-198" dirty="0">
                 <a:latin typeface="Source Sans Pro"/>
                 <a:cs typeface="Source Sans Pro"/>
               </a:rPr>
               <a:t>as</a:t>
             </a:r>
             <a:r>
-              <a:rPr sz="2000" spc="30" dirty="0">
-                <a:latin typeface="Source Sans Pro"/>
-                <a:cs typeface="Source Sans Pro"/>
-              </a:rPr>
-              <a:t> </a:t>
-            </a:r>
-            <a:r>
-              <a:rPr sz="2000" spc="-188" dirty="0">
+              <a:rPr sz="2400" spc="30" dirty="0">
+                <a:latin typeface="Source Sans Pro"/>
+                <a:cs typeface="Source Sans Pro"/>
+              </a:rPr>
+              <a:t> </a:t>
+            </a:r>
+            <a:r>
+              <a:rPr sz="2400" spc="-188" dirty="0">
                 <a:latin typeface="Source Sans Pro"/>
                 <a:cs typeface="Source Sans Pro"/>
               </a:rPr>
               <a:t>those</a:t>
             </a:r>
             <a:r>
-              <a:rPr sz="2000" spc="20" dirty="0">
-                <a:latin typeface="Source Sans Pro"/>
-                <a:cs typeface="Source Sans Pro"/>
-              </a:rPr>
-              <a:t> </a:t>
-            </a:r>
-            <a:r>
-              <a:rPr sz="2000" spc="-208" dirty="0">
+              <a:rPr sz="2400" spc="20" dirty="0">
+                <a:latin typeface="Source Sans Pro"/>
+                <a:cs typeface="Source Sans Pro"/>
+              </a:rPr>
+              <a:t> </a:t>
+            </a:r>
+            <a:r>
+              <a:rPr sz="2400" spc="-208" dirty="0">
                 <a:latin typeface="Source Sans Pro"/>
                 <a:cs typeface="Source Sans Pro"/>
               </a:rPr>
               <a:t>of</a:t>
             </a:r>
             <a:r>
-              <a:rPr sz="2000" spc="30" dirty="0">
-                <a:latin typeface="Source Sans Pro"/>
-                <a:cs typeface="Source Sans Pro"/>
-              </a:rPr>
-              <a:t> </a:t>
-            </a:r>
-            <a:r>
-              <a:rPr sz="2000" spc="-188" dirty="0">
+              <a:rPr sz="2400" spc="30" dirty="0">
+                <a:latin typeface="Source Sans Pro"/>
+                <a:cs typeface="Source Sans Pro"/>
+              </a:rPr>
+              <a:t> </a:t>
+            </a:r>
+            <a:r>
+              <a:rPr sz="2400" spc="-188" dirty="0">
                 <a:solidFill>
                   <a:srgbClr val="990000"/>
                 </a:solidFill>
@@ -8330,7 +8330,7 @@
               <a:t>Dow</a:t>
             </a:r>
             <a:r>
-              <a:rPr sz="2000" spc="-178" dirty="0">
+              <a:rPr sz="2400" spc="-178" dirty="0">
                 <a:solidFill>
                   <a:srgbClr val="990000"/>
                 </a:solidFill>
@@ -8340,7 +8340,7 @@
               <a:t> </a:t>
             </a:r>
             <a:r>
-              <a:rPr sz="2000" spc="-129" dirty="0">
+              <a:rPr sz="2400" spc="-129" dirty="0">
                 <a:solidFill>
                   <a:srgbClr val="990000"/>
                 </a:solidFill>
@@ -8350,7 +8350,7 @@
               <a:t>Jones </a:t>
             </a:r>
             <a:r>
-              <a:rPr sz="2000" spc="-198" dirty="0">
+              <a:rPr sz="2400" spc="-198" dirty="0">
                 <a:solidFill>
                   <a:srgbClr val="990000"/>
                 </a:solidFill>
@@ -8360,7 +8360,7 @@
               <a:t>return</a:t>
             </a:r>
             <a:r>
-              <a:rPr sz="2000" spc="-595" dirty="0">
+              <a:rPr sz="2400" spc="-595" dirty="0">
                 <a:solidFill>
                   <a:srgbClr val="990000"/>
                 </a:solidFill>
@@ -8370,21 +8370,21 @@
               <a:t> </a:t>
             </a:r>
             <a:r>
-              <a:rPr sz="2000" spc="-129" dirty="0">
+              <a:rPr sz="2400" spc="-129" dirty="0">
                 <a:latin typeface="Source Sans Pro"/>
                 <a:cs typeface="Source Sans Pro"/>
               </a:rPr>
               <a:t>and</a:t>
             </a:r>
             <a:r>
-              <a:rPr sz="2000" spc="40" dirty="0">
-                <a:latin typeface="Source Sans Pro"/>
-                <a:cs typeface="Source Sans Pro"/>
-              </a:rPr>
-              <a:t> </a:t>
-            </a:r>
-            <a:r>
-              <a:rPr sz="2000" spc="-188" dirty="0">
+              <a:rPr sz="2400" spc="40" dirty="0">
+                <a:latin typeface="Source Sans Pro"/>
+                <a:cs typeface="Source Sans Pro"/>
+              </a:rPr>
+              <a:t> </a:t>
+            </a:r>
+            <a:r>
+              <a:rPr sz="2400" spc="-188" dirty="0">
                 <a:solidFill>
                   <a:srgbClr val="990000"/>
                 </a:solidFill>
@@ -8394,7 +8394,7 @@
               <a:t>Log</a:t>
             </a:r>
             <a:r>
-              <a:rPr sz="2000" spc="-159" dirty="0">
+              <a:rPr sz="2400" spc="-159" dirty="0">
                 <a:solidFill>
                   <a:srgbClr val="990000"/>
                 </a:solidFill>
@@ -8404,7 +8404,7 @@
               <a:t> </a:t>
             </a:r>
             <a:r>
-              <a:rPr sz="2000" spc="-20" dirty="0">
+              <a:rPr sz="2400" spc="-20" dirty="0">
                 <a:solidFill>
                   <a:srgbClr val="990000"/>
                 </a:solidFill>
@@ -8414,13 +8414,13 @@
               <a:t>volatility</a:t>
             </a:r>
             <a:r>
-              <a:rPr sz="2000" spc="-20" dirty="0">
+              <a:rPr sz="2400" spc="-20" dirty="0">
                 <a:latin typeface="Source Sans Pro"/>
                 <a:cs typeface="Source Sans Pro"/>
               </a:rPr>
               <a:t>.</a:t>
             </a:r>
-            <a:endParaRPr sz="2000" dirty="0">
+            <a:endParaRPr sz="2400" dirty="0">
               <a:latin typeface="Source Sans Pro"/>
               <a:cs typeface="Source Sans Pro"/>
             </a:endParaRPr>
@@ -8435,7 +8435,7 @@
               </a:spcBef>
             </a:pPr>
             <a:r>
-              <a:rPr sz="2000" spc="-129" dirty="0">
+              <a:rPr sz="2400" spc="-129" dirty="0">
                 <a:solidFill>
                   <a:srgbClr val="0000FF"/>
                 </a:solidFill>
@@ -8445,7 +8445,7 @@
               <a:t>These</a:t>
             </a:r>
             <a:r>
-              <a:rPr sz="2000" spc="-30" dirty="0">
+              <a:rPr sz="2400" spc="-30" dirty="0">
                 <a:solidFill>
                   <a:srgbClr val="0000FF"/>
                 </a:solidFill>
@@ -8455,7 +8455,7 @@
               <a:t> </a:t>
             </a:r>
             <a:r>
-              <a:rPr sz="2000" spc="-59" dirty="0">
+              <a:rPr sz="2400" spc="-59" dirty="0">
                 <a:solidFill>
                   <a:srgbClr val="0000FF"/>
                 </a:solidFill>
@@ -8465,7 +8465,7 @@
               <a:t>data</a:t>
             </a:r>
             <a:r>
-              <a:rPr sz="2000" spc="-40" dirty="0">
+              <a:rPr sz="2400" spc="-40" dirty="0">
                 <a:solidFill>
                   <a:srgbClr val="0000FF"/>
                 </a:solidFill>
@@ -8475,7 +8475,7 @@
               <a:t> </a:t>
             </a:r>
             <a:r>
-              <a:rPr sz="2000" spc="-168" dirty="0">
+              <a:rPr sz="2400" spc="-168" dirty="0">
                 <a:solidFill>
                   <a:srgbClr val="0000FF"/>
                 </a:solidFill>
@@ -8485,7 +8485,7 @@
               <a:t>were</a:t>
             </a:r>
             <a:r>
-              <a:rPr sz="2000" spc="10" dirty="0">
+              <a:rPr sz="2400" spc="10" dirty="0">
                 <a:solidFill>
                   <a:srgbClr val="0000FF"/>
                 </a:solidFill>
@@ -8495,7 +8495,7 @@
               <a:t> </a:t>
             </a:r>
             <a:r>
-              <a:rPr sz="2000" spc="-198" dirty="0">
+              <a:rPr sz="2400" spc="-198" dirty="0">
                 <a:solidFill>
                   <a:srgbClr val="0000FF"/>
                 </a:solidFill>
@@ -8505,7 +8505,7 @@
               <a:t>assembled</a:t>
             </a:r>
             <a:r>
-              <a:rPr sz="2000" spc="30" dirty="0">
+              <a:rPr sz="2400" spc="30" dirty="0">
                 <a:solidFill>
                   <a:srgbClr val="0000FF"/>
                 </a:solidFill>
@@ -8515,7 +8515,7 @@
               <a:t> </a:t>
             </a:r>
             <a:r>
-              <a:rPr sz="2000" spc="-40" dirty="0">
+              <a:rPr sz="2400" spc="-40" dirty="0">
                 <a:solidFill>
                   <a:srgbClr val="0000FF"/>
                 </a:solidFill>
@@ -8525,7 +8525,7 @@
               <a:t>by</a:t>
             </a:r>
             <a:r>
-              <a:rPr sz="2000" spc="-10" dirty="0">
+              <a:rPr sz="2400" spc="-10" dirty="0">
                 <a:solidFill>
                   <a:srgbClr val="0000FF"/>
                 </a:solidFill>
@@ -8535,7 +8535,7 @@
               <a:t> </a:t>
             </a:r>
             <a:r>
-              <a:rPr sz="2000" spc="-40" dirty="0">
+              <a:rPr sz="2400" spc="-40" dirty="0">
                 <a:solidFill>
                   <a:srgbClr val="0000FF"/>
                 </a:solidFill>
@@ -8545,7 +8545,7 @@
               <a:t>LeBaron</a:t>
             </a:r>
             <a:r>
-              <a:rPr sz="2000" spc="-10" dirty="0">
+              <a:rPr sz="2400" spc="-10" dirty="0">
                 <a:solidFill>
                   <a:srgbClr val="0000FF"/>
                 </a:solidFill>
@@ -8555,7 +8555,7 @@
               <a:t> </a:t>
             </a:r>
             <a:r>
-              <a:rPr sz="2000" spc="-119" dirty="0">
+              <a:rPr sz="2400" spc="-119" dirty="0">
                 <a:solidFill>
                   <a:srgbClr val="0000FF"/>
                 </a:solidFill>
@@ -8565,7 +8565,7 @@
               <a:t>and</a:t>
             </a:r>
             <a:r>
-              <a:rPr sz="2000" dirty="0">
+              <a:rPr sz="2400" dirty="0">
                 <a:solidFill>
                   <a:srgbClr val="0000FF"/>
                 </a:solidFill>
@@ -8575,7 +8575,7 @@
               <a:t> </a:t>
             </a:r>
             <a:r>
-              <a:rPr sz="2000" spc="-119" dirty="0">
+              <a:rPr sz="2400" spc="-119" dirty="0">
                 <a:solidFill>
                   <a:srgbClr val="0000FF"/>
                 </a:solidFill>
@@ -8585,7 +8585,7 @@
               <a:t>Weigend</a:t>
             </a:r>
             <a:r>
-              <a:rPr sz="2000" spc="-10" dirty="0">
+              <a:rPr sz="2400" spc="-10" dirty="0">
                 <a:solidFill>
                   <a:srgbClr val="0000FF"/>
                 </a:solidFill>
@@ -8595,7 +8595,7 @@
               <a:t> </a:t>
             </a:r>
             <a:r>
-              <a:rPr sz="2000" spc="-149" dirty="0">
+              <a:rPr sz="2400" spc="-149" dirty="0">
                 <a:solidFill>
                   <a:srgbClr val="0000FF"/>
                 </a:solidFill>
@@ -8605,7 +8605,7 @@
               <a:t>(1998)</a:t>
             </a:r>
             <a:r>
-              <a:rPr sz="2000" spc="-10" dirty="0">
+              <a:rPr sz="2400" spc="-10" dirty="0">
                 <a:solidFill>
                   <a:srgbClr val="0000FF"/>
                 </a:solidFill>
@@ -8615,7 +8615,7 @@
               <a:t> </a:t>
             </a:r>
             <a:r>
-              <a:rPr sz="2000" i="1" spc="-40" dirty="0">
+              <a:rPr sz="2400" i="1" spc="-40" dirty="0">
                 <a:solidFill>
                   <a:srgbClr val="0000FF"/>
                 </a:solidFill>
@@ -8625,7 +8625,7 @@
               <a:t>IEEE </a:t>
             </a:r>
             <a:r>
-              <a:rPr sz="2000" i="1" spc="-297" dirty="0">
+              <a:rPr sz="2400" i="1" spc="-297" dirty="0">
                 <a:solidFill>
                   <a:srgbClr val="0000FF"/>
                 </a:solidFill>
@@ -8635,7 +8635,7 @@
               <a:t>Transactions</a:t>
             </a:r>
             <a:r>
-              <a:rPr sz="2000" i="1" spc="-466" dirty="0">
+              <a:rPr sz="2400" i="1" spc="-466" dirty="0">
                 <a:solidFill>
                   <a:srgbClr val="0000FF"/>
                 </a:solidFill>
@@ -8645,7 +8645,7 @@
               <a:t> </a:t>
             </a:r>
             <a:r>
-              <a:rPr sz="2000" i="1" spc="-159" dirty="0">
+              <a:rPr sz="2400" i="1" spc="-159" dirty="0">
                 <a:solidFill>
                   <a:srgbClr val="0000FF"/>
                 </a:solidFill>
@@ -8655,7 +8655,7 @@
               <a:t>on</a:t>
             </a:r>
             <a:r>
-              <a:rPr sz="2000" i="1" spc="-466" dirty="0">
+              <a:rPr sz="2400" i="1" spc="-466" dirty="0">
                 <a:solidFill>
                   <a:srgbClr val="0000FF"/>
                 </a:solidFill>
@@ -8665,7 +8665,7 @@
               <a:t> </a:t>
             </a:r>
             <a:r>
-              <a:rPr sz="2000" i="1" spc="-268" dirty="0">
+              <a:rPr sz="2400" i="1" spc="-268" dirty="0">
                 <a:solidFill>
                   <a:srgbClr val="0000FF"/>
                 </a:solidFill>
@@ -8675,7 +8675,7 @@
               <a:t>Neural</a:t>
             </a:r>
             <a:r>
-              <a:rPr sz="2000" i="1" spc="-466" dirty="0">
+              <a:rPr sz="2400" i="1" spc="-466" dirty="0">
                 <a:solidFill>
                   <a:srgbClr val="0000FF"/>
                 </a:solidFill>
@@ -8685,7 +8685,7 @@
               <a:t> </a:t>
             </a:r>
             <a:r>
-              <a:rPr sz="2000" i="1" spc="-218" dirty="0">
+              <a:rPr sz="2400" i="1" spc="-218" dirty="0">
                 <a:solidFill>
                   <a:srgbClr val="0000FF"/>
                 </a:solidFill>
@@ -8695,7 +8695,7 @@
               <a:t>Networks</a:t>
             </a:r>
             <a:r>
-              <a:rPr sz="2000" spc="-218" dirty="0">
+              <a:rPr sz="2400" spc="-218" dirty="0">
                 <a:solidFill>
                   <a:srgbClr val="0000FF"/>
                 </a:solidFill>
@@ -8705,7 +8705,7 @@
               <a:t>,</a:t>
             </a:r>
             <a:r>
-              <a:rPr sz="2000" spc="59" dirty="0">
+              <a:rPr sz="2400" spc="59" dirty="0">
                 <a:solidFill>
                   <a:srgbClr val="0000FF"/>
                 </a:solidFill>
@@ -8715,7 +8715,7 @@
               <a:t> </a:t>
             </a:r>
             <a:r>
-              <a:rPr sz="2000" spc="-20" dirty="0">
+              <a:rPr sz="2400" spc="-20" dirty="0">
                 <a:solidFill>
                   <a:srgbClr val="0000FF"/>
                 </a:solidFill>
@@ -8725,7 +8725,7 @@
               <a:t>9(1):</a:t>
             </a:r>
             <a:r>
-              <a:rPr sz="2000" spc="277" dirty="0">
+              <a:rPr sz="2400" spc="277" dirty="0">
                 <a:solidFill>
                   <a:srgbClr val="0000FF"/>
                 </a:solidFill>
@@ -8735,7 +8735,7 @@
               <a:t> </a:t>
             </a:r>
             <a:r>
-              <a:rPr sz="2000" spc="-20" dirty="0">
+              <a:rPr sz="2400" spc="-20" dirty="0">
                 <a:solidFill>
                   <a:srgbClr val="0000FF"/>
                 </a:solidFill>
@@ -8744,7 +8744,7 @@
               </a:rPr>
               <a:t>213–220.</a:t>
             </a:r>
-            <a:endParaRPr sz="2000" dirty="0">
+            <a:endParaRPr sz="2400" dirty="0">
               <a:solidFill>
                 <a:srgbClr val="0000FF"/>
               </a:solidFill>
@@ -8757,7 +8757,7 @@
     </p:spTree>
     <p:extLst>
       <p:ext uri="{BB962C8B-B14F-4D97-AF65-F5344CB8AC3E}">
-        <p14:creationId xmlns:p14="http://schemas.microsoft.com/office/powerpoint/2010/main" val="792460901"/>
+        <p14:creationId xmlns:p14="http://schemas.microsoft.com/office/powerpoint/2010/main" val="2614543763"/>
       </p:ext>
     </p:extLst>
   </p:cSld>
@@ -8801,7 +8801,7 @@
         </p:spPr>
         <p:txBody>
           <a:bodyPr vert="horz" wrap="square" lIns="0" tIns="33975" rIns="0" bIns="0" rtlCol="0" anchor="ctr">
-            <a:spAutoFit/>
+            <a:normAutofit/>
             <a:scene3d>
               <a:camera prst="orthographicFront"/>
               <a:lightRig rig="threePt" dir="t">
@@ -8881,7 +8881,7 @@
         </p:spPr>
         <p:txBody>
           <a:bodyPr vert="horz" wrap="square" lIns="0" tIns="22650" rIns="0" bIns="0" rtlCol="0">
-            <a:spAutoFit/>
+            <a:normAutofit/>
           </a:bodyPr>
           <a:lstStyle/>
           <a:p>
@@ -10232,7 +10232,7 @@
     </p:spTree>
     <p:extLst>
       <p:ext uri="{BB962C8B-B14F-4D97-AF65-F5344CB8AC3E}">
-        <p14:creationId xmlns:p14="http://schemas.microsoft.com/office/powerpoint/2010/main" val="322984132"/>
+        <p14:creationId xmlns:p14="http://schemas.microsoft.com/office/powerpoint/2010/main" val="3804110721"/>
       </p:ext>
     </p:extLst>
   </p:cSld>
@@ -10565,7 +10565,7 @@
         </p:spPr>
         <p:txBody>
           <a:bodyPr vert="horz" wrap="square" lIns="0" tIns="22650" rIns="0" bIns="0" rtlCol="0">
-            <a:spAutoFit/>
+            <a:normAutofit/>
           </a:bodyPr>
           <a:lstStyle/>
           <a:p>
@@ -10605,7 +10605,7 @@
         </p:spPr>
         <p:txBody>
           <a:bodyPr vert="horz" wrap="square" lIns="0" tIns="22650" rIns="0" bIns="0" rtlCol="0">
-            <a:spAutoFit/>
+            <a:normAutofit/>
           </a:bodyPr>
           <a:lstStyle/>
           <a:p>
@@ -10645,7 +10645,7 @@
         </p:spPr>
         <p:txBody>
           <a:bodyPr vert="horz" wrap="square" lIns="0" tIns="22650" rIns="0" bIns="0" rtlCol="0">
-            <a:spAutoFit/>
+            <a:normAutofit/>
           </a:bodyPr>
           <a:lstStyle/>
           <a:p>
@@ -10685,7 +10685,7 @@
         </p:spPr>
         <p:txBody>
           <a:bodyPr vert="horz" wrap="square" lIns="0" tIns="22650" rIns="0" bIns="0" rtlCol="0">
-            <a:spAutoFit/>
+            <a:normAutofit/>
           </a:bodyPr>
           <a:lstStyle/>
           <a:p>
@@ -10725,7 +10725,7 @@
         </p:spPr>
         <p:txBody>
           <a:bodyPr vert="vert270" wrap="square" lIns="0" tIns="0" rIns="0" bIns="0" rtlCol="0">
-            <a:spAutoFit/>
+            <a:normAutofit/>
           </a:bodyPr>
           <a:lstStyle/>
           <a:p>
@@ -10765,7 +10765,7 @@
         </p:spPr>
         <p:txBody>
           <a:bodyPr vert="vert270" wrap="square" lIns="0" tIns="0" rIns="0" bIns="0" rtlCol="0">
-            <a:spAutoFit/>
+            <a:normAutofit/>
           </a:bodyPr>
           <a:lstStyle/>
           <a:p>
@@ -10833,7 +10833,7 @@
         </p:spPr>
         <p:txBody>
           <a:bodyPr vert="horz" wrap="square" lIns="0" tIns="25167" rIns="0" bIns="0" rtlCol="0">
-            <a:spAutoFit/>
+            <a:normAutofit/>
           </a:bodyPr>
           <a:lstStyle/>
           <a:p>
@@ -10929,7 +10929,7 @@
         </p:spPr>
         <p:txBody>
           <a:bodyPr vert="horz" wrap="square" lIns="0" tIns="22650" rIns="0" bIns="0" rtlCol="0">
-            <a:spAutoFit/>
+            <a:normAutofit/>
           </a:bodyPr>
           <a:lstStyle/>
           <a:p>
@@ -10969,7 +10969,7 @@
         </p:spPr>
         <p:txBody>
           <a:bodyPr vert="vert270" wrap="square" lIns="0" tIns="0" rIns="0" bIns="0" rtlCol="0">
-            <a:spAutoFit/>
+            <a:normAutofit/>
           </a:bodyPr>
           <a:lstStyle/>
           <a:p>
@@ -11023,7 +11023,7 @@
         </p:spPr>
         <p:txBody>
           <a:bodyPr vert="horz" wrap="square" lIns="0" tIns="22650" rIns="0" bIns="0" rtlCol="0">
-            <a:spAutoFit/>
+            <a:normAutofit/>
           </a:bodyPr>
           <a:lstStyle/>
           <a:p>
@@ -11514,7 +11514,7 @@
     </p:spTree>
     <p:extLst>
       <p:ext uri="{BB962C8B-B14F-4D97-AF65-F5344CB8AC3E}">
-        <p14:creationId xmlns:p14="http://schemas.microsoft.com/office/powerpoint/2010/main" val="2028749762"/>
+        <p14:creationId xmlns:p14="http://schemas.microsoft.com/office/powerpoint/2010/main" val="1182318238"/>
       </p:ext>
     </p:extLst>
   </p:cSld>
@@ -11625,7 +11625,7 @@
         </p:spPr>
         <p:txBody>
           <a:bodyPr vert="horz" wrap="square" lIns="0" tIns="22650" rIns="0" bIns="0" rtlCol="0">
-            <a:spAutoFit/>
+            <a:normAutofit/>
           </a:bodyPr>
           <a:lstStyle/>
           <a:p>
@@ -11915,7 +11915,7 @@
             </p:spPr>
             <p:txBody>
               <a:bodyPr vert="horz" wrap="square" lIns="0" tIns="22650" rIns="0" bIns="0" rtlCol="0">
-                <a:spAutoFit/>
+                <a:normAutofit/>
               </a:bodyPr>
               <a:lstStyle/>
               <a:p>
@@ -12980,7 +12980,7 @@
           </p:spPr>
           <p:txBody>
             <a:bodyPr vert="horz" wrap="square" lIns="0" tIns="11430" rIns="0" bIns="0" rtlCol="0">
-              <a:spAutoFit/>
+              <a:normAutofit/>
             </a:bodyPr>
             <a:lstStyle/>
             <a:p>
@@ -13128,7 +13128,7 @@
         </p:spPr>
         <p:txBody>
           <a:bodyPr vert="horz" wrap="square" lIns="0" tIns="11430" rIns="0" bIns="0" rtlCol="0">
-            <a:spAutoFit/>
+            <a:normAutofit/>
           </a:bodyPr>
           <a:lstStyle/>
           <a:p>
@@ -13168,7 +13168,7 @@
     </p:spTree>
     <p:extLst>
       <p:ext uri="{BB962C8B-B14F-4D97-AF65-F5344CB8AC3E}">
-        <p14:creationId xmlns:p14="http://schemas.microsoft.com/office/powerpoint/2010/main" val="319139108"/>
+        <p14:creationId xmlns:p14="http://schemas.microsoft.com/office/powerpoint/2010/main" val="1901192972"/>
       </p:ext>
     </p:extLst>
   </p:cSld>
@@ -13389,7 +13389,7 @@
         </p:spPr>
         <p:txBody>
           <a:bodyPr vert="horz" wrap="square" lIns="0" tIns="22650" rIns="0" bIns="0" rtlCol="0">
-            <a:spAutoFit/>
+            <a:normAutofit/>
           </a:bodyPr>
           <a:lstStyle/>
           <a:p>
@@ -14043,7 +14043,7 @@
     </p:spTree>
     <p:extLst>
       <p:ext uri="{BB962C8B-B14F-4D97-AF65-F5344CB8AC3E}">
-        <p14:creationId xmlns:p14="http://schemas.microsoft.com/office/powerpoint/2010/main" val="1684580108"/>
+        <p14:creationId xmlns:p14="http://schemas.microsoft.com/office/powerpoint/2010/main" val="949024720"/>
       </p:ext>
     </p:extLst>
   </p:cSld>
@@ -14166,7 +14166,7 @@
         </p:spPr>
         <p:txBody>
           <a:bodyPr vert="horz" wrap="square" lIns="0" tIns="13842" rIns="0" bIns="0" rtlCol="0">
-            <a:spAutoFit/>
+            <a:normAutofit/>
           </a:bodyPr>
           <a:lstStyle/>
           <a:p>
@@ -14318,7 +14318,7 @@
     </p:spTree>
     <p:extLst>
       <p:ext uri="{BB962C8B-B14F-4D97-AF65-F5344CB8AC3E}">
-        <p14:creationId xmlns:p14="http://schemas.microsoft.com/office/powerpoint/2010/main" val="3495643496"/>
+        <p14:creationId xmlns:p14="http://schemas.microsoft.com/office/powerpoint/2010/main" val="2976115625"/>
       </p:ext>
     </p:extLst>
   </p:cSld>
@@ -14353,8 +14353,8 @@
         </p:nvSpPr>
         <p:spPr>
           <a:xfrm>
-            <a:off x="1981200" y="1143000"/>
-            <a:ext cx="8229600" cy="4799326"/>
+            <a:off x="899160" y="1690688"/>
+            <a:ext cx="9136380" cy="3870546"/>
           </a:xfrm>
           <a:prstGeom prst="rect">
             <a:avLst/>
@@ -14362,7 +14362,7 @@
         </p:spPr>
         <p:txBody>
           <a:bodyPr vert="horz" wrap="square" lIns="0" tIns="13842" rIns="0" bIns="0" rtlCol="0">
-            <a:spAutoFit/>
+            <a:normAutofit/>
           </a:bodyPr>
           <a:lstStyle/>
           <a:p>
@@ -16562,7 +16562,7 @@
     </p:spTree>
     <p:extLst>
       <p:ext uri="{BB962C8B-B14F-4D97-AF65-F5344CB8AC3E}">
-        <p14:creationId xmlns:p14="http://schemas.microsoft.com/office/powerpoint/2010/main" val="1639735595"/>
+        <p14:creationId xmlns:p14="http://schemas.microsoft.com/office/powerpoint/2010/main" val="1345746291"/>
       </p:ext>
     </p:extLst>
   </p:cSld>
@@ -16824,7 +16824,7 @@
         </p:spPr>
         <p:txBody>
           <a:bodyPr vert="horz" wrap="square" lIns="0" tIns="33975" rIns="0" bIns="0" rtlCol="0" anchor="ctr">
-            <a:spAutoFit/>
+            <a:normAutofit/>
             <a:scene3d>
               <a:camera prst="orthographicFront"/>
               <a:lightRig rig="threePt" dir="t">
@@ -16937,7 +16937,7 @@
         </p:spPr>
         <p:txBody>
           <a:bodyPr vert="horz" wrap="square" lIns="0" tIns="52851" rIns="0" bIns="0" rtlCol="0">
-            <a:spAutoFit/>
+            <a:normAutofit/>
           </a:bodyPr>
           <a:lstStyle/>
           <a:p>
@@ -18592,7 +18592,7 @@
     </p:spTree>
     <p:extLst>
       <p:ext uri="{BB962C8B-B14F-4D97-AF65-F5344CB8AC3E}">
-        <p14:creationId xmlns:p14="http://schemas.microsoft.com/office/powerpoint/2010/main" val="3084540875"/>
+        <p14:creationId xmlns:p14="http://schemas.microsoft.com/office/powerpoint/2010/main" val="4142812174"/>
       </p:ext>
     </p:extLst>
   </p:cSld>
@@ -18636,7 +18636,7 @@
         </p:spPr>
         <p:txBody>
           <a:bodyPr vert="horz" wrap="square" lIns="0" tIns="33975" rIns="0" bIns="0" rtlCol="0" anchor="ctr">
-            <a:spAutoFit/>
+            <a:normAutofit/>
             <a:scene3d>
               <a:camera prst="orthographicFront"/>
               <a:lightRig rig="threePt" dir="t">
@@ -18742,7 +18742,7 @@
             </p:spPr>
             <p:txBody>
               <a:bodyPr vert="horz" wrap="square" lIns="0" tIns="13842" rIns="0" bIns="0" rtlCol="0">
-                <a:spAutoFit/>
+                <a:normAutofit/>
               </a:bodyPr>
               <a:lstStyle/>
               <a:p>
@@ -19972,7 +19972,7 @@
     </p:spTree>
     <p:extLst>
       <p:ext uri="{BB962C8B-B14F-4D97-AF65-F5344CB8AC3E}">
-        <p14:creationId xmlns:p14="http://schemas.microsoft.com/office/powerpoint/2010/main" val="2301801273"/>
+        <p14:creationId xmlns:p14="http://schemas.microsoft.com/office/powerpoint/2010/main" val="3091189110"/>
       </p:ext>
     </p:extLst>
   </p:cSld>
@@ -20016,7 +20016,7 @@
         </p:spPr>
         <p:txBody>
           <a:bodyPr vert="horz" wrap="square" lIns="0" tIns="33975" rIns="0" bIns="0" rtlCol="0" anchor="ctr">
-            <a:spAutoFit/>
+            <a:normAutofit/>
             <a:scene3d>
               <a:camera prst="orthographicFront"/>
               <a:lightRig rig="threePt" dir="t">
@@ -20110,7 +20110,7 @@
         </p:spPr>
         <p:txBody>
           <a:bodyPr vert="horz" wrap="square" lIns="0" tIns="6985" rIns="0" bIns="0" rtlCol="0">
-            <a:spAutoFit/>
+            <a:normAutofit/>
           </a:bodyPr>
           <a:lstStyle/>
           <a:p>
@@ -21233,7 +21233,7 @@
         </p:spPr>
         <p:txBody>
           <a:bodyPr vert="horz" wrap="square" lIns="0" tIns="151130" rIns="0" bIns="0" rtlCol="0">
-            <a:spAutoFit/>
+            <a:normAutofit/>
           </a:bodyPr>
           <a:lstStyle/>
           <a:p>
@@ -21394,7 +21394,7 @@
     </p:spTree>
     <p:extLst>
       <p:ext uri="{BB962C8B-B14F-4D97-AF65-F5344CB8AC3E}">
-        <p14:creationId xmlns:p14="http://schemas.microsoft.com/office/powerpoint/2010/main" val="1187409521"/>
+        <p14:creationId xmlns:p14="http://schemas.microsoft.com/office/powerpoint/2010/main" val="2230395642"/>
       </p:ext>
     </p:extLst>
   </p:cSld>
@@ -21716,7 +21716,7 @@
             </p:spPr>
             <p:txBody>
               <a:bodyPr vert="horz" wrap="square" lIns="0" tIns="12065" rIns="0" bIns="0" rtlCol="0">
-                <a:spAutoFit/>
+                <a:normAutofit/>
               </a:bodyPr>
               <a:lstStyle/>
               <a:p>
@@ -23496,7 +23496,7 @@
     </p:spTree>
     <p:extLst>
       <p:ext uri="{BB962C8B-B14F-4D97-AF65-F5344CB8AC3E}">
-        <p14:creationId xmlns:p14="http://schemas.microsoft.com/office/powerpoint/2010/main" val="4294866524"/>
+        <p14:creationId xmlns:p14="http://schemas.microsoft.com/office/powerpoint/2010/main" val="1849212390"/>
       </p:ext>
     </p:extLst>
   </p:cSld>
@@ -23540,7 +23540,7 @@
         </p:spPr>
         <p:txBody>
           <a:bodyPr vert="horz" wrap="square" lIns="0" tIns="33975" rIns="0" bIns="0" rtlCol="0" anchor="ctr">
-            <a:spAutoFit/>
+            <a:normAutofit/>
             <a:scene3d>
               <a:camera prst="orthographicFront"/>
               <a:lightRig rig="threePt" dir="t">
@@ -23620,7 +23620,7 @@
         </p:spPr>
         <p:txBody>
           <a:bodyPr vert="horz" wrap="square" lIns="0" tIns="33975" rIns="0" bIns="0" rtlCol="0">
-            <a:spAutoFit/>
+            <a:normAutofit/>
           </a:bodyPr>
           <a:lstStyle/>
           <a:p>
@@ -24429,7 +24429,7 @@
     </p:spTree>
     <p:extLst>
       <p:ext uri="{BB962C8B-B14F-4D97-AF65-F5344CB8AC3E}">
-        <p14:creationId xmlns:p14="http://schemas.microsoft.com/office/powerpoint/2010/main" val="470299641"/>
+        <p14:creationId xmlns:p14="http://schemas.microsoft.com/office/powerpoint/2010/main" val="3459326548"/>
       </p:ext>
     </p:extLst>
   </p:cSld>
@@ -24440,7 +24440,7 @@
 </file>
 
 <file path=ppt/theme/theme1.xml><?xml version="1.0" encoding="utf-8"?>
-<a:theme xmlns:a="http://schemas.openxmlformats.org/drawingml/2006/main" name="Office Theme [1783534497615]">
+<a:theme xmlns:a="http://schemas.openxmlformats.org/drawingml/2006/main" name="Office Theme [1783534571199]">
   <a:themeElements>
     <a:clrScheme name="Office">
       <a:dk1>

--- a/Presentations/Day-3-Recurrent Neural Networks-NEW.pptx
+++ b/Presentations/Day-3-Recurrent Neural Networks-NEW.pptx
@@ -12,7 +12,7 @@
     <p:sldId id="367" r:id="rId3"/>
     <p:sldId id="368" r:id="rId4"/>
     <p:sldId id="396" r:id="rId5"/>
-    <p:sldId id="395" r:id="rId6"/>
+    <p:sldId id="409" r:id="rId6"/>
     <p:sldId id="397" r:id="rId7"/>
     <p:sldId id="377" r:id="rId8"/>
     <p:sldId id="398" r:id="rId9"/>
@@ -16635,7 +16635,12 @@
             <p:ph type="title"/>
           </p:nvPr>
         </p:nvSpPr>
-        <p:spPr/>
+        <p:spPr>
+          <a:xfrm>
+            <a:off x="712470" y="0"/>
+            <a:ext cx="10515600" cy="1325563"/>
+          </a:xfrm>
+        </p:spPr>
         <p:txBody>
           <a:bodyPr/>
           <a:lstStyle/>
@@ -16644,31 +16649,6 @@
               <a:rPr lang="en-US" dirty="0"/>
               <a:t>Recurrent Neural Networks</a:t>
             </a:r>
-          </a:p>
-        </p:txBody>
-      </p:sp>
-      <p:sp>
-        <p:nvSpPr>
-          <p:cNvPr id="3" name="Content Placeholder 2">
-            <a:extLst>
-              <a:ext uri="{FF2B5EF4-FFF2-40B4-BE49-F238E27FC236}">
-                <a16:creationId xmlns:a16="http://schemas.microsoft.com/office/drawing/2014/main" id="{B58713B4-1198-C835-D783-5C7040D7E26F}"/>
-              </a:ext>
-            </a:extLst>
-          </p:cNvPr>
-          <p:cNvSpPr>
-            <a:spLocks noGrp="1"/>
-          </p:cNvSpPr>
-          <p:nvPr>
-            <p:ph idx="1"/>
-          </p:nvPr>
-        </p:nvSpPr>
-        <p:spPr/>
-        <p:txBody>
-          <a:bodyPr/>
-          <a:lstStyle/>
-          <a:p>
-            <a:endParaRPr lang="en-US"/>
           </a:p>
         </p:txBody>
       </p:sp>
@@ -16740,7 +16720,12 @@
             <p:ph type="title"/>
           </p:nvPr>
         </p:nvSpPr>
-        <p:spPr/>
+        <p:spPr>
+          <a:xfrm>
+            <a:off x="838200" y="-114935"/>
+            <a:ext cx="10515600" cy="1325563"/>
+          </a:xfrm>
+        </p:spPr>
         <p:txBody>
           <a:bodyPr/>
           <a:lstStyle/>
@@ -16749,31 +16734,6 @@
               <a:rPr lang="en-US" dirty="0"/>
               <a:t>Recurrent Neural Networks</a:t>
             </a:r>
-          </a:p>
-        </p:txBody>
-      </p:sp>
-      <p:sp>
-        <p:nvSpPr>
-          <p:cNvPr id="4" name="Content Placeholder 3">
-            <a:extLst>
-              <a:ext uri="{FF2B5EF4-FFF2-40B4-BE49-F238E27FC236}">
-                <a16:creationId xmlns:a16="http://schemas.microsoft.com/office/drawing/2014/main" id="{0D8106C2-C479-3482-A231-27E0DCAD71F1}"/>
-              </a:ext>
-            </a:extLst>
-          </p:cNvPr>
-          <p:cNvSpPr>
-            <a:spLocks noGrp="1"/>
-          </p:cNvSpPr>
-          <p:nvPr>
-            <p:ph idx="1"/>
-          </p:nvPr>
-        </p:nvSpPr>
-        <p:spPr/>
-        <p:txBody>
-          <a:bodyPr/>
-          <a:lstStyle/>
-          <a:p>
-            <a:endParaRPr lang="en-US"/>
           </a:p>
         </p:txBody>
       </p:sp>
@@ -18655,39 +18615,39 @@
               </a:spcBef>
             </a:pPr>
             <a:r>
-              <a:rPr dirty="0"/>
+              <a:rPr sz="3000" dirty="0"/>
               <a:t>Simple</a:t>
             </a:r>
             <a:r>
-              <a:rPr spc="535" dirty="0"/>
-              <a:t> </a:t>
-            </a:r>
-            <a:r>
-              <a:rPr spc="109" dirty="0"/>
+              <a:rPr sz="3000" spc="535" dirty="0"/>
+              <a:t> </a:t>
+            </a:r>
+            <a:r>
+              <a:rPr sz="3000" spc="109" dirty="0"/>
               <a:t>Recurrent</a:t>
             </a:r>
             <a:r>
-              <a:rPr spc="545" dirty="0"/>
-              <a:t> </a:t>
-            </a:r>
-            <a:r>
-              <a:rPr dirty="0"/>
+              <a:rPr sz="3000" spc="545" dirty="0"/>
+              <a:t> </a:t>
+            </a:r>
+            <a:r>
+              <a:rPr sz="3000" dirty="0"/>
               <a:t>Neural</a:t>
             </a:r>
             <a:r>
-              <a:rPr spc="555" dirty="0"/>
-              <a:t> </a:t>
-            </a:r>
-            <a:r>
-              <a:rPr dirty="0"/>
+              <a:rPr sz="3000" spc="555" dirty="0"/>
+              <a:t> </a:t>
+            </a:r>
+            <a:r>
+              <a:rPr sz="3000" dirty="0"/>
               <a:t>Network</a:t>
             </a:r>
             <a:r>
-              <a:rPr spc="545" dirty="0"/>
-              <a:t> </a:t>
-            </a:r>
-            <a:r>
-              <a:rPr spc="79" dirty="0"/>
+              <a:rPr sz="3000" spc="545" dirty="0"/>
+              <a:t> </a:t>
+            </a:r>
+            <a:r>
+              <a:rPr sz="3000" spc="79" dirty="0"/>
               <a:t>Architecture</a:t>
             </a:r>
           </a:p>
@@ -19972,7 +19932,7 @@
     </p:spTree>
     <p:extLst>
       <p:ext uri="{BB962C8B-B14F-4D97-AF65-F5344CB8AC3E}">
-        <p14:creationId xmlns:p14="http://schemas.microsoft.com/office/powerpoint/2010/main" val="3091189110"/>
+        <p14:creationId xmlns:p14="http://schemas.microsoft.com/office/powerpoint/2010/main" val="3670291178"/>
       </p:ext>
     </p:extLst>
   </p:cSld>
